--- a/paper/Figs/forking-paths.pptx
+++ b/paper/Figs/forking-paths.pptx
@@ -2,18 +2,18 @@
 <file path=ppt/presentation.xml><?xml version="1.0" encoding="utf-8"?>
 <p:presentation xmlns:a="http://schemas.openxmlformats.org/drawingml/2006/main" xmlns:r="http://schemas.openxmlformats.org/officeDocument/2006/relationships" xmlns:p="http://schemas.openxmlformats.org/presentationml/2006/main" saveSubsetFonts="1" autoCompressPictures="0">
   <p:sldMasterIdLst>
-    <p:sldMasterId id="2147483648" r:id="rId1"/>
+    <p:sldMasterId id="2147483684" r:id="rId1"/>
   </p:sldMasterIdLst>
   <p:sldIdLst>
     <p:sldId id="256" r:id="rId2"/>
   </p:sldIdLst>
-  <p:sldSz cx="12192000" cy="6858000"/>
+  <p:sldSz cx="16459200" cy="4114800"/>
   <p:notesSz cx="6858000" cy="9144000"/>
   <p:defaultTextStyle>
     <a:defPPr>
       <a:defRPr lang="en-US"/>
     </a:defPPr>
-    <a:lvl1pPr marL="0" algn="l" defTabSz="914400" rtl="0" eaLnBrk="1" latinLnBrk="0" hangingPunct="1">
+    <a:lvl1pPr marL="0" algn="l" defTabSz="457200" rtl="0" eaLnBrk="1" latinLnBrk="0" hangingPunct="1">
       <a:defRPr sz="1800" kern="1200">
         <a:solidFill>
           <a:schemeClr val="tx1"/>
@@ -23,7 +23,7 @@
         <a:cs typeface="+mn-cs"/>
       </a:defRPr>
     </a:lvl1pPr>
-    <a:lvl2pPr marL="457200" algn="l" defTabSz="914400" rtl="0" eaLnBrk="1" latinLnBrk="0" hangingPunct="1">
+    <a:lvl2pPr marL="457200" algn="l" defTabSz="457200" rtl="0" eaLnBrk="1" latinLnBrk="0" hangingPunct="1">
       <a:defRPr sz="1800" kern="1200">
         <a:solidFill>
           <a:schemeClr val="tx1"/>
@@ -33,7 +33,7 @@
         <a:cs typeface="+mn-cs"/>
       </a:defRPr>
     </a:lvl2pPr>
-    <a:lvl3pPr marL="914400" algn="l" defTabSz="914400" rtl="0" eaLnBrk="1" latinLnBrk="0" hangingPunct="1">
+    <a:lvl3pPr marL="914400" algn="l" defTabSz="457200" rtl="0" eaLnBrk="1" latinLnBrk="0" hangingPunct="1">
       <a:defRPr sz="1800" kern="1200">
         <a:solidFill>
           <a:schemeClr val="tx1"/>
@@ -43,7 +43,7 @@
         <a:cs typeface="+mn-cs"/>
       </a:defRPr>
     </a:lvl3pPr>
-    <a:lvl4pPr marL="1371600" algn="l" defTabSz="914400" rtl="0" eaLnBrk="1" latinLnBrk="0" hangingPunct="1">
+    <a:lvl4pPr marL="1371600" algn="l" defTabSz="457200" rtl="0" eaLnBrk="1" latinLnBrk="0" hangingPunct="1">
       <a:defRPr sz="1800" kern="1200">
         <a:solidFill>
           <a:schemeClr val="tx1"/>
@@ -53,7 +53,7 @@
         <a:cs typeface="+mn-cs"/>
       </a:defRPr>
     </a:lvl4pPr>
-    <a:lvl5pPr marL="1828800" algn="l" defTabSz="914400" rtl="0" eaLnBrk="1" latinLnBrk="0" hangingPunct="1">
+    <a:lvl5pPr marL="1828800" algn="l" defTabSz="457200" rtl="0" eaLnBrk="1" latinLnBrk="0" hangingPunct="1">
       <a:defRPr sz="1800" kern="1200">
         <a:solidFill>
           <a:schemeClr val="tx1"/>
@@ -63,7 +63,7 @@
         <a:cs typeface="+mn-cs"/>
       </a:defRPr>
     </a:lvl5pPr>
-    <a:lvl6pPr marL="2286000" algn="l" defTabSz="914400" rtl="0" eaLnBrk="1" latinLnBrk="0" hangingPunct="1">
+    <a:lvl6pPr marL="2286000" algn="l" defTabSz="457200" rtl="0" eaLnBrk="1" latinLnBrk="0" hangingPunct="1">
       <a:defRPr sz="1800" kern="1200">
         <a:solidFill>
           <a:schemeClr val="tx1"/>
@@ -73,7 +73,7 @@
         <a:cs typeface="+mn-cs"/>
       </a:defRPr>
     </a:lvl6pPr>
-    <a:lvl7pPr marL="2743200" algn="l" defTabSz="914400" rtl="0" eaLnBrk="1" latinLnBrk="0" hangingPunct="1">
+    <a:lvl7pPr marL="2743200" algn="l" defTabSz="457200" rtl="0" eaLnBrk="1" latinLnBrk="0" hangingPunct="1">
       <a:defRPr sz="1800" kern="1200">
         <a:solidFill>
           <a:schemeClr val="tx1"/>
@@ -83,7 +83,7 @@
         <a:cs typeface="+mn-cs"/>
       </a:defRPr>
     </a:lvl7pPr>
-    <a:lvl8pPr marL="3200400" algn="l" defTabSz="914400" rtl="0" eaLnBrk="1" latinLnBrk="0" hangingPunct="1">
+    <a:lvl8pPr marL="3200400" algn="l" defTabSz="457200" rtl="0" eaLnBrk="1" latinLnBrk="0" hangingPunct="1">
       <a:defRPr sz="1800" kern="1200">
         <a:solidFill>
           <a:schemeClr val="tx1"/>
@@ -93,7 +93,7 @@
         <a:cs typeface="+mn-cs"/>
       </a:defRPr>
     </a:lvl8pPr>
-    <a:lvl9pPr marL="3657600" algn="l" defTabSz="914400" rtl="0" eaLnBrk="1" latinLnBrk="0" hangingPunct="1">
+    <a:lvl9pPr marL="3657600" algn="l" defTabSz="457200" rtl="0" eaLnBrk="1" latinLnBrk="0" hangingPunct="1">
       <a:defRPr sz="1800" kern="1200">
         <a:solidFill>
           <a:schemeClr val="tx1"/>
@@ -126,13 +126,7 @@
       </p:grpSpPr>
       <p:sp>
         <p:nvSpPr>
-          <p:cNvPr id="2" name="Title 1">
-            <a:extLst>
-              <a:ext uri="{FF2B5EF4-FFF2-40B4-BE49-F238E27FC236}">
-                <a16:creationId xmlns:a16="http://schemas.microsoft.com/office/drawing/2014/main" id="{542369F2-937A-F76F-900C-E6A3DE591B65}"/>
-              </a:ext>
-            </a:extLst>
-          </p:cNvPr>
+          <p:cNvPr id="2" name="Title 1"/>
           <p:cNvSpPr>
             <a:spLocks noGrp="1"/>
           </p:cNvSpPr>
@@ -142,15 +136,15 @@
         </p:nvSpPr>
         <p:spPr>
           <a:xfrm>
-            <a:off x="1524000" y="1122363"/>
-            <a:ext cx="9144000" cy="2387600"/>
+            <a:off x="2057400" y="673418"/>
+            <a:ext cx="12344400" cy="1432560"/>
           </a:xfrm>
         </p:spPr>
         <p:txBody>
           <a:bodyPr anchor="b"/>
           <a:lstStyle>
             <a:lvl1pPr algn="ctr">
-              <a:defRPr sz="6000"/>
+              <a:defRPr sz="3600"/>
             </a:lvl1pPr>
           </a:lstStyle>
           <a:p>
@@ -158,18 +152,13 @@
               <a:rPr lang="en-US"/>
               <a:t>Click to edit Master title style</a:t>
             </a:r>
-          </a:p>
-        </p:txBody>
-      </p:sp>
-      <p:sp>
-        <p:nvSpPr>
-          <p:cNvPr id="3" name="Subtitle 2">
-            <a:extLst>
-              <a:ext uri="{FF2B5EF4-FFF2-40B4-BE49-F238E27FC236}">
-                <a16:creationId xmlns:a16="http://schemas.microsoft.com/office/drawing/2014/main" id="{4F019F52-D07E-F290-F16E-32D573E1DAE0}"/>
-              </a:ext>
-            </a:extLst>
-          </p:cNvPr>
+            <a:endParaRPr lang="en-US" dirty="0"/>
+          </a:p>
+        </p:txBody>
+      </p:sp>
+      <p:sp>
+        <p:nvSpPr>
+          <p:cNvPr id="3" name="Subtitle 2"/>
           <p:cNvSpPr>
             <a:spLocks noGrp="1"/>
           </p:cNvSpPr>
@@ -179,8 +168,8 @@
         </p:nvSpPr>
         <p:spPr>
           <a:xfrm>
-            <a:off x="1524000" y="3602038"/>
-            <a:ext cx="9144000" cy="1655762"/>
+            <a:off x="2057400" y="2161223"/>
+            <a:ext cx="12344400" cy="993457"/>
           </a:xfrm>
         </p:spPr>
         <p:txBody>
@@ -188,39 +177,39 @@
           <a:lstStyle>
             <a:lvl1pPr marL="0" indent="0" algn="ctr">
               <a:buNone/>
-              <a:defRPr sz="2400"/>
+              <a:defRPr sz="1440"/>
             </a:lvl1pPr>
-            <a:lvl2pPr marL="457200" indent="0" algn="ctr">
-              <a:buNone/>
-              <a:defRPr sz="2000"/>
+            <a:lvl2pPr marL="274320" indent="0" algn="ctr">
+              <a:buNone/>
+              <a:defRPr sz="1200"/>
             </a:lvl2pPr>
-            <a:lvl3pPr marL="914400" indent="0" algn="ctr">
-              <a:buNone/>
-              <a:defRPr sz="1800"/>
+            <a:lvl3pPr marL="548640" indent="0" algn="ctr">
+              <a:buNone/>
+              <a:defRPr sz="1080"/>
             </a:lvl3pPr>
-            <a:lvl4pPr marL="1371600" indent="0" algn="ctr">
-              <a:buNone/>
-              <a:defRPr sz="1600"/>
+            <a:lvl4pPr marL="822960" indent="0" algn="ctr">
+              <a:buNone/>
+              <a:defRPr sz="960"/>
             </a:lvl4pPr>
-            <a:lvl5pPr marL="1828800" indent="0" algn="ctr">
-              <a:buNone/>
-              <a:defRPr sz="1600"/>
+            <a:lvl5pPr marL="1097280" indent="0" algn="ctr">
+              <a:buNone/>
+              <a:defRPr sz="960"/>
             </a:lvl5pPr>
-            <a:lvl6pPr marL="2286000" indent="0" algn="ctr">
-              <a:buNone/>
-              <a:defRPr sz="1600"/>
+            <a:lvl6pPr marL="1371600" indent="0" algn="ctr">
+              <a:buNone/>
+              <a:defRPr sz="960"/>
             </a:lvl6pPr>
-            <a:lvl7pPr marL="2743200" indent="0" algn="ctr">
-              <a:buNone/>
-              <a:defRPr sz="1600"/>
+            <a:lvl7pPr marL="1645920" indent="0" algn="ctr">
+              <a:buNone/>
+              <a:defRPr sz="960"/>
             </a:lvl7pPr>
-            <a:lvl8pPr marL="3200400" indent="0" algn="ctr">
-              <a:buNone/>
-              <a:defRPr sz="1600"/>
+            <a:lvl8pPr marL="1920240" indent="0" algn="ctr">
+              <a:buNone/>
+              <a:defRPr sz="960"/>
             </a:lvl8pPr>
-            <a:lvl9pPr marL="3657600" indent="0" algn="ctr">
-              <a:buNone/>
-              <a:defRPr sz="1600"/>
+            <a:lvl9pPr marL="2194560" indent="0" algn="ctr">
+              <a:buNone/>
+              <a:defRPr sz="960"/>
             </a:lvl9pPr>
           </a:lstStyle>
           <a:p>
@@ -228,18 +217,13 @@
               <a:rPr lang="en-US"/>
               <a:t>Click to edit Master subtitle style</a:t>
             </a:r>
-          </a:p>
-        </p:txBody>
-      </p:sp>
-      <p:sp>
-        <p:nvSpPr>
-          <p:cNvPr id="4" name="Date Placeholder 3">
-            <a:extLst>
-              <a:ext uri="{FF2B5EF4-FFF2-40B4-BE49-F238E27FC236}">
-                <a16:creationId xmlns:a16="http://schemas.microsoft.com/office/drawing/2014/main" id="{A95AE81E-4C62-424E-3145-2F60738CF477}"/>
-              </a:ext>
-            </a:extLst>
-          </p:cNvPr>
+            <a:endParaRPr lang="en-US" dirty="0"/>
+          </a:p>
+        </p:txBody>
+      </p:sp>
+      <p:sp>
+        <p:nvSpPr>
+          <p:cNvPr id="4" name="Date Placeholder 3"/>
           <p:cNvSpPr>
             <a:spLocks noGrp="1"/>
           </p:cNvSpPr>
@@ -262,13 +246,7 @@
       </p:sp>
       <p:sp>
         <p:nvSpPr>
-          <p:cNvPr id="5" name="Footer Placeholder 4">
-            <a:extLst>
-              <a:ext uri="{FF2B5EF4-FFF2-40B4-BE49-F238E27FC236}">
-                <a16:creationId xmlns:a16="http://schemas.microsoft.com/office/drawing/2014/main" id="{133D4167-9EB5-663B-D818-C57F089BC2BC}"/>
-              </a:ext>
-            </a:extLst>
-          </p:cNvPr>
+          <p:cNvPr id="5" name="Footer Placeholder 4"/>
           <p:cNvSpPr>
             <a:spLocks noGrp="1"/>
           </p:cNvSpPr>
@@ -287,13 +265,7 @@
       </p:sp>
       <p:sp>
         <p:nvSpPr>
-          <p:cNvPr id="6" name="Slide Number Placeholder 5">
-            <a:extLst>
-              <a:ext uri="{FF2B5EF4-FFF2-40B4-BE49-F238E27FC236}">
-                <a16:creationId xmlns:a16="http://schemas.microsoft.com/office/drawing/2014/main" id="{3DEF6735-8E9C-A104-CA70-4EAE4BD91FCB}"/>
-              </a:ext>
-            </a:extLst>
-          </p:cNvPr>
+          <p:cNvPr id="6" name="Slide Number Placeholder 5"/>
           <p:cNvSpPr>
             <a:spLocks noGrp="1"/>
           </p:cNvSpPr>
@@ -317,7 +289,7 @@
     </p:spTree>
     <p:extLst>
       <p:ext uri="{BB962C8B-B14F-4D97-AF65-F5344CB8AC3E}">
-        <p14:creationId xmlns:p14="http://schemas.microsoft.com/office/powerpoint/2010/main" val="3253931532"/>
+        <p14:creationId xmlns:p14="http://schemas.microsoft.com/office/powerpoint/2010/main" val="920275353"/>
       </p:ext>
     </p:extLst>
   </p:cSld>
@@ -346,13 +318,7 @@
       </p:grpSpPr>
       <p:sp>
         <p:nvSpPr>
-          <p:cNvPr id="2" name="Title 1">
-            <a:extLst>
-              <a:ext uri="{FF2B5EF4-FFF2-40B4-BE49-F238E27FC236}">
-                <a16:creationId xmlns:a16="http://schemas.microsoft.com/office/drawing/2014/main" id="{9761DE54-3E76-7B92-8F2F-7EE4F1159A61}"/>
-              </a:ext>
-            </a:extLst>
-          </p:cNvPr>
+          <p:cNvPr id="2" name="Title 1"/>
           <p:cNvSpPr>
             <a:spLocks noGrp="1"/>
           </p:cNvSpPr>
@@ -369,18 +335,13 @@
               <a:rPr lang="en-US"/>
               <a:t>Click to edit Master title style</a:t>
             </a:r>
-          </a:p>
-        </p:txBody>
-      </p:sp>
-      <p:sp>
-        <p:nvSpPr>
-          <p:cNvPr id="3" name="Vertical Text Placeholder 2">
-            <a:extLst>
-              <a:ext uri="{FF2B5EF4-FFF2-40B4-BE49-F238E27FC236}">
-                <a16:creationId xmlns:a16="http://schemas.microsoft.com/office/drawing/2014/main" id="{845D7FF8-E6A3-7822-FE5B-2D1A1F9F8572}"/>
-              </a:ext>
-            </a:extLst>
-          </p:cNvPr>
+            <a:endParaRPr lang="en-US" dirty="0"/>
+          </a:p>
+        </p:txBody>
+      </p:sp>
+      <p:sp>
+        <p:nvSpPr>
+          <p:cNvPr id="3" name="Vertical Text Placeholder 2"/>
           <p:cNvSpPr>
             <a:spLocks noGrp="1"/>
           </p:cNvSpPr>
@@ -426,18 +387,13 @@
               <a:rPr lang="en-US"/>
               <a:t>Fifth level</a:t>
             </a:r>
-          </a:p>
-        </p:txBody>
-      </p:sp>
-      <p:sp>
-        <p:nvSpPr>
-          <p:cNvPr id="4" name="Date Placeholder 3">
-            <a:extLst>
-              <a:ext uri="{FF2B5EF4-FFF2-40B4-BE49-F238E27FC236}">
-                <a16:creationId xmlns:a16="http://schemas.microsoft.com/office/drawing/2014/main" id="{CE7CEFA0-90F5-A459-F982-29FEA28909E1}"/>
-              </a:ext>
-            </a:extLst>
-          </p:cNvPr>
+            <a:endParaRPr lang="en-US" dirty="0"/>
+          </a:p>
+        </p:txBody>
+      </p:sp>
+      <p:sp>
+        <p:nvSpPr>
+          <p:cNvPr id="4" name="Date Placeholder 3"/>
           <p:cNvSpPr>
             <a:spLocks noGrp="1"/>
           </p:cNvSpPr>
@@ -460,13 +416,7 @@
       </p:sp>
       <p:sp>
         <p:nvSpPr>
-          <p:cNvPr id="5" name="Footer Placeholder 4">
-            <a:extLst>
-              <a:ext uri="{FF2B5EF4-FFF2-40B4-BE49-F238E27FC236}">
-                <a16:creationId xmlns:a16="http://schemas.microsoft.com/office/drawing/2014/main" id="{1CF04F05-1CC9-BDD5-4B85-9FC070B9EB2F}"/>
-              </a:ext>
-            </a:extLst>
-          </p:cNvPr>
+          <p:cNvPr id="5" name="Footer Placeholder 4"/>
           <p:cNvSpPr>
             <a:spLocks noGrp="1"/>
           </p:cNvSpPr>
@@ -485,13 +435,7 @@
       </p:sp>
       <p:sp>
         <p:nvSpPr>
-          <p:cNvPr id="6" name="Slide Number Placeholder 5">
-            <a:extLst>
-              <a:ext uri="{FF2B5EF4-FFF2-40B4-BE49-F238E27FC236}">
-                <a16:creationId xmlns:a16="http://schemas.microsoft.com/office/drawing/2014/main" id="{65FD2F25-3C06-F217-C91B-6E4E3C3B76E5}"/>
-              </a:ext>
-            </a:extLst>
-          </p:cNvPr>
+          <p:cNvPr id="6" name="Slide Number Placeholder 5"/>
           <p:cNvSpPr>
             <a:spLocks noGrp="1"/>
           </p:cNvSpPr>
@@ -515,7 +459,7 @@
     </p:spTree>
     <p:extLst>
       <p:ext uri="{BB962C8B-B14F-4D97-AF65-F5344CB8AC3E}">
-        <p14:creationId xmlns:p14="http://schemas.microsoft.com/office/powerpoint/2010/main" val="1262641045"/>
+        <p14:creationId xmlns:p14="http://schemas.microsoft.com/office/powerpoint/2010/main" val="2663716409"/>
       </p:ext>
     </p:extLst>
   </p:cSld>
@@ -544,13 +488,7 @@
       </p:grpSpPr>
       <p:sp>
         <p:nvSpPr>
-          <p:cNvPr id="2" name="Vertical Title 1">
-            <a:extLst>
-              <a:ext uri="{FF2B5EF4-FFF2-40B4-BE49-F238E27FC236}">
-                <a16:creationId xmlns:a16="http://schemas.microsoft.com/office/drawing/2014/main" id="{F4BB9116-B0AB-FF46-2F1E-6F210BABA996}"/>
-              </a:ext>
-            </a:extLst>
-          </p:cNvPr>
+          <p:cNvPr id="2" name="Vertical Title 1"/>
           <p:cNvSpPr>
             <a:spLocks noGrp="1"/>
           </p:cNvSpPr>
@@ -560,8 +498,8 @@
         </p:nvSpPr>
         <p:spPr>
           <a:xfrm>
-            <a:off x="8724900" y="365125"/>
-            <a:ext cx="2628900" cy="5811838"/>
+            <a:off x="11778615" y="219075"/>
+            <a:ext cx="3549015" cy="3487103"/>
           </a:xfrm>
         </p:spPr>
         <p:txBody>
@@ -572,18 +510,13 @@
               <a:rPr lang="en-US"/>
               <a:t>Click to edit Master title style</a:t>
             </a:r>
-          </a:p>
-        </p:txBody>
-      </p:sp>
-      <p:sp>
-        <p:nvSpPr>
-          <p:cNvPr id="3" name="Vertical Text Placeholder 2">
-            <a:extLst>
-              <a:ext uri="{FF2B5EF4-FFF2-40B4-BE49-F238E27FC236}">
-                <a16:creationId xmlns:a16="http://schemas.microsoft.com/office/drawing/2014/main" id="{92D3C819-6656-993F-E075-0AAA68B33AE5}"/>
-              </a:ext>
-            </a:extLst>
-          </p:cNvPr>
+            <a:endParaRPr lang="en-US" dirty="0"/>
+          </a:p>
+        </p:txBody>
+      </p:sp>
+      <p:sp>
+        <p:nvSpPr>
+          <p:cNvPr id="3" name="Vertical Text Placeholder 2"/>
           <p:cNvSpPr>
             <a:spLocks noGrp="1"/>
           </p:cNvSpPr>
@@ -593,8 +526,8 @@
         </p:nvSpPr>
         <p:spPr>
           <a:xfrm>
-            <a:off x="838200" y="365125"/>
-            <a:ext cx="7734300" cy="5811838"/>
+            <a:off x="1131570" y="219075"/>
+            <a:ext cx="10441305" cy="3487103"/>
           </a:xfrm>
         </p:spPr>
         <p:txBody>
@@ -634,18 +567,13 @@
               <a:rPr lang="en-US"/>
               <a:t>Fifth level</a:t>
             </a:r>
-          </a:p>
-        </p:txBody>
-      </p:sp>
-      <p:sp>
-        <p:nvSpPr>
-          <p:cNvPr id="4" name="Date Placeholder 3">
-            <a:extLst>
-              <a:ext uri="{FF2B5EF4-FFF2-40B4-BE49-F238E27FC236}">
-                <a16:creationId xmlns:a16="http://schemas.microsoft.com/office/drawing/2014/main" id="{C51D865A-6BB3-4465-9055-9A82B70B4107}"/>
-              </a:ext>
-            </a:extLst>
-          </p:cNvPr>
+            <a:endParaRPr lang="en-US" dirty="0"/>
+          </a:p>
+        </p:txBody>
+      </p:sp>
+      <p:sp>
+        <p:nvSpPr>
+          <p:cNvPr id="4" name="Date Placeholder 3"/>
           <p:cNvSpPr>
             <a:spLocks noGrp="1"/>
           </p:cNvSpPr>
@@ -668,13 +596,7 @@
       </p:sp>
       <p:sp>
         <p:nvSpPr>
-          <p:cNvPr id="5" name="Footer Placeholder 4">
-            <a:extLst>
-              <a:ext uri="{FF2B5EF4-FFF2-40B4-BE49-F238E27FC236}">
-                <a16:creationId xmlns:a16="http://schemas.microsoft.com/office/drawing/2014/main" id="{66783CEE-80AB-AAF7-0FE5-0AB6180673E4}"/>
-              </a:ext>
-            </a:extLst>
-          </p:cNvPr>
+          <p:cNvPr id="5" name="Footer Placeholder 4"/>
           <p:cNvSpPr>
             <a:spLocks noGrp="1"/>
           </p:cNvSpPr>
@@ -693,13 +615,7 @@
       </p:sp>
       <p:sp>
         <p:nvSpPr>
-          <p:cNvPr id="6" name="Slide Number Placeholder 5">
-            <a:extLst>
-              <a:ext uri="{FF2B5EF4-FFF2-40B4-BE49-F238E27FC236}">
-                <a16:creationId xmlns:a16="http://schemas.microsoft.com/office/drawing/2014/main" id="{38A08BCE-195A-7C5C-AB5A-98CC5A5EC601}"/>
-              </a:ext>
-            </a:extLst>
-          </p:cNvPr>
+          <p:cNvPr id="6" name="Slide Number Placeholder 5"/>
           <p:cNvSpPr>
             <a:spLocks noGrp="1"/>
           </p:cNvSpPr>
@@ -723,7 +639,7 @@
     </p:spTree>
     <p:extLst>
       <p:ext uri="{BB962C8B-B14F-4D97-AF65-F5344CB8AC3E}">
-        <p14:creationId xmlns:p14="http://schemas.microsoft.com/office/powerpoint/2010/main" val="1105606496"/>
+        <p14:creationId xmlns:p14="http://schemas.microsoft.com/office/powerpoint/2010/main" val="1291786144"/>
       </p:ext>
     </p:extLst>
   </p:cSld>
@@ -752,13 +668,7 @@
       </p:grpSpPr>
       <p:sp>
         <p:nvSpPr>
-          <p:cNvPr id="2" name="Title 1">
-            <a:extLst>
-              <a:ext uri="{FF2B5EF4-FFF2-40B4-BE49-F238E27FC236}">
-                <a16:creationId xmlns:a16="http://schemas.microsoft.com/office/drawing/2014/main" id="{623ABC75-A207-80FA-9368-E537AB2CD118}"/>
-              </a:ext>
-            </a:extLst>
-          </p:cNvPr>
+          <p:cNvPr id="2" name="Title 1"/>
           <p:cNvSpPr>
             <a:spLocks noGrp="1"/>
           </p:cNvSpPr>
@@ -775,18 +685,13 @@
               <a:rPr lang="en-US"/>
               <a:t>Click to edit Master title style</a:t>
             </a:r>
-          </a:p>
-        </p:txBody>
-      </p:sp>
-      <p:sp>
-        <p:nvSpPr>
-          <p:cNvPr id="3" name="Content Placeholder 2">
-            <a:extLst>
-              <a:ext uri="{FF2B5EF4-FFF2-40B4-BE49-F238E27FC236}">
-                <a16:creationId xmlns:a16="http://schemas.microsoft.com/office/drawing/2014/main" id="{F9B58DB0-8E29-19B2-B2BD-52A3604C53E1}"/>
-              </a:ext>
-            </a:extLst>
-          </p:cNvPr>
+            <a:endParaRPr lang="en-US" dirty="0"/>
+          </a:p>
+        </p:txBody>
+      </p:sp>
+      <p:sp>
+        <p:nvSpPr>
+          <p:cNvPr id="3" name="Content Placeholder 2"/>
           <p:cNvSpPr>
             <a:spLocks noGrp="1"/>
           </p:cNvSpPr>
@@ -832,18 +737,13 @@
               <a:rPr lang="en-US"/>
               <a:t>Fifth level</a:t>
             </a:r>
-          </a:p>
-        </p:txBody>
-      </p:sp>
-      <p:sp>
-        <p:nvSpPr>
-          <p:cNvPr id="4" name="Date Placeholder 3">
-            <a:extLst>
-              <a:ext uri="{FF2B5EF4-FFF2-40B4-BE49-F238E27FC236}">
-                <a16:creationId xmlns:a16="http://schemas.microsoft.com/office/drawing/2014/main" id="{5FA229F1-F835-18AD-6476-ACAAB199BB87}"/>
-              </a:ext>
-            </a:extLst>
-          </p:cNvPr>
+            <a:endParaRPr lang="en-US" dirty="0"/>
+          </a:p>
+        </p:txBody>
+      </p:sp>
+      <p:sp>
+        <p:nvSpPr>
+          <p:cNvPr id="4" name="Date Placeholder 3"/>
           <p:cNvSpPr>
             <a:spLocks noGrp="1"/>
           </p:cNvSpPr>
@@ -866,13 +766,7 @@
       </p:sp>
       <p:sp>
         <p:nvSpPr>
-          <p:cNvPr id="5" name="Footer Placeholder 4">
-            <a:extLst>
-              <a:ext uri="{FF2B5EF4-FFF2-40B4-BE49-F238E27FC236}">
-                <a16:creationId xmlns:a16="http://schemas.microsoft.com/office/drawing/2014/main" id="{29F6EC45-AA40-E0A8-104D-6AFEE7BC02F5}"/>
-              </a:ext>
-            </a:extLst>
-          </p:cNvPr>
+          <p:cNvPr id="5" name="Footer Placeholder 4"/>
           <p:cNvSpPr>
             <a:spLocks noGrp="1"/>
           </p:cNvSpPr>
@@ -891,13 +785,7 @@
       </p:sp>
       <p:sp>
         <p:nvSpPr>
-          <p:cNvPr id="6" name="Slide Number Placeholder 5">
-            <a:extLst>
-              <a:ext uri="{FF2B5EF4-FFF2-40B4-BE49-F238E27FC236}">
-                <a16:creationId xmlns:a16="http://schemas.microsoft.com/office/drawing/2014/main" id="{0CD4922E-18BE-6D73-AF19-2C9B150D733C}"/>
-              </a:ext>
-            </a:extLst>
-          </p:cNvPr>
+          <p:cNvPr id="6" name="Slide Number Placeholder 5"/>
           <p:cNvSpPr>
             <a:spLocks noGrp="1"/>
           </p:cNvSpPr>
@@ -921,7 +809,7 @@
     </p:spTree>
     <p:extLst>
       <p:ext uri="{BB962C8B-B14F-4D97-AF65-F5344CB8AC3E}">
-        <p14:creationId xmlns:p14="http://schemas.microsoft.com/office/powerpoint/2010/main" val="3762893960"/>
+        <p14:creationId xmlns:p14="http://schemas.microsoft.com/office/powerpoint/2010/main" val="4098815108"/>
       </p:ext>
     </p:extLst>
   </p:cSld>
@@ -950,13 +838,7 @@
       </p:grpSpPr>
       <p:sp>
         <p:nvSpPr>
-          <p:cNvPr id="2" name="Title 1">
-            <a:extLst>
-              <a:ext uri="{FF2B5EF4-FFF2-40B4-BE49-F238E27FC236}">
-                <a16:creationId xmlns:a16="http://schemas.microsoft.com/office/drawing/2014/main" id="{D9D4E4EA-5E83-8998-096E-2666476A4FD7}"/>
-              </a:ext>
-            </a:extLst>
-          </p:cNvPr>
+          <p:cNvPr id="2" name="Title 1"/>
           <p:cNvSpPr>
             <a:spLocks noGrp="1"/>
           </p:cNvSpPr>
@@ -966,15 +848,15 @@
         </p:nvSpPr>
         <p:spPr>
           <a:xfrm>
-            <a:off x="831850" y="1709738"/>
-            <a:ext cx="10515600" cy="2852737"/>
+            <a:off x="1122997" y="1025843"/>
+            <a:ext cx="14196060" cy="1711642"/>
           </a:xfrm>
         </p:spPr>
         <p:txBody>
           <a:bodyPr anchor="b"/>
           <a:lstStyle>
             <a:lvl1pPr>
-              <a:defRPr sz="6000"/>
+              <a:defRPr sz="3600"/>
             </a:lvl1pPr>
           </a:lstStyle>
           <a:p>
@@ -982,18 +864,13 @@
               <a:rPr lang="en-US"/>
               <a:t>Click to edit Master title style</a:t>
             </a:r>
-          </a:p>
-        </p:txBody>
-      </p:sp>
-      <p:sp>
-        <p:nvSpPr>
-          <p:cNvPr id="3" name="Text Placeholder 2">
-            <a:extLst>
-              <a:ext uri="{FF2B5EF4-FFF2-40B4-BE49-F238E27FC236}">
-                <a16:creationId xmlns:a16="http://schemas.microsoft.com/office/drawing/2014/main" id="{CBCE056C-7A4B-A7C0-D4C4-8ADEDEC57C51}"/>
-              </a:ext>
-            </a:extLst>
-          </p:cNvPr>
+            <a:endParaRPr lang="en-US" dirty="0"/>
+          </a:p>
+        </p:txBody>
+      </p:sp>
+      <p:sp>
+        <p:nvSpPr>
+          <p:cNvPr id="3" name="Text Placeholder 2"/>
           <p:cNvSpPr>
             <a:spLocks noGrp="1"/>
           </p:cNvSpPr>
@@ -1003,8 +880,8 @@
         </p:nvSpPr>
         <p:spPr>
           <a:xfrm>
-            <a:off x="831850" y="4589463"/>
-            <a:ext cx="10515600" cy="1500187"/>
+            <a:off x="1122997" y="2753678"/>
+            <a:ext cx="14196060" cy="900112"/>
           </a:xfrm>
         </p:spPr>
         <p:txBody>
@@ -1012,7 +889,7 @@
           <a:lstStyle>
             <a:lvl1pPr marL="0" indent="0">
               <a:buNone/>
-              <a:defRPr sz="2400">
+              <a:defRPr sz="1440">
                 <a:solidFill>
                   <a:schemeClr val="tx1">
                     <a:tint val="82000"/>
@@ -1020,9 +897,9 @@
                 </a:solidFill>
               </a:defRPr>
             </a:lvl1pPr>
-            <a:lvl2pPr marL="457200" indent="0">
-              <a:buNone/>
-              <a:defRPr sz="2000">
+            <a:lvl2pPr marL="274320" indent="0">
+              <a:buNone/>
+              <a:defRPr sz="1200">
                 <a:solidFill>
                   <a:schemeClr val="tx1">
                     <a:tint val="82000"/>
@@ -1030,9 +907,9 @@
                 </a:solidFill>
               </a:defRPr>
             </a:lvl2pPr>
-            <a:lvl3pPr marL="914400" indent="0">
-              <a:buNone/>
-              <a:defRPr sz="1800">
+            <a:lvl3pPr marL="548640" indent="0">
+              <a:buNone/>
+              <a:defRPr sz="1080">
                 <a:solidFill>
                   <a:schemeClr val="tx1">
                     <a:tint val="82000"/>
@@ -1040,9 +917,9 @@
                 </a:solidFill>
               </a:defRPr>
             </a:lvl3pPr>
-            <a:lvl4pPr marL="1371600" indent="0">
-              <a:buNone/>
-              <a:defRPr sz="1600">
+            <a:lvl4pPr marL="822960" indent="0">
+              <a:buNone/>
+              <a:defRPr sz="960">
                 <a:solidFill>
                   <a:schemeClr val="tx1">
                     <a:tint val="82000"/>
@@ -1050,9 +927,9 @@
                 </a:solidFill>
               </a:defRPr>
             </a:lvl4pPr>
-            <a:lvl5pPr marL="1828800" indent="0">
-              <a:buNone/>
-              <a:defRPr sz="1600">
+            <a:lvl5pPr marL="1097280" indent="0">
+              <a:buNone/>
+              <a:defRPr sz="960">
                 <a:solidFill>
                   <a:schemeClr val="tx1">
                     <a:tint val="82000"/>
@@ -1060,9 +937,9 @@
                 </a:solidFill>
               </a:defRPr>
             </a:lvl5pPr>
-            <a:lvl6pPr marL="2286000" indent="0">
-              <a:buNone/>
-              <a:defRPr sz="1600">
+            <a:lvl6pPr marL="1371600" indent="0">
+              <a:buNone/>
+              <a:defRPr sz="960">
                 <a:solidFill>
                   <a:schemeClr val="tx1">
                     <a:tint val="82000"/>
@@ -1070,9 +947,9 @@
                 </a:solidFill>
               </a:defRPr>
             </a:lvl6pPr>
-            <a:lvl7pPr marL="2743200" indent="0">
-              <a:buNone/>
-              <a:defRPr sz="1600">
+            <a:lvl7pPr marL="1645920" indent="0">
+              <a:buNone/>
+              <a:defRPr sz="960">
                 <a:solidFill>
                   <a:schemeClr val="tx1">
                     <a:tint val="82000"/>
@@ -1080,9 +957,9 @@
                 </a:solidFill>
               </a:defRPr>
             </a:lvl7pPr>
-            <a:lvl8pPr marL="3200400" indent="0">
-              <a:buNone/>
-              <a:defRPr sz="1600">
+            <a:lvl8pPr marL="1920240" indent="0">
+              <a:buNone/>
+              <a:defRPr sz="960">
                 <a:solidFill>
                   <a:schemeClr val="tx1">
                     <a:tint val="82000"/>
@@ -1090,9 +967,9 @@
                 </a:solidFill>
               </a:defRPr>
             </a:lvl8pPr>
-            <a:lvl9pPr marL="3657600" indent="0">
-              <a:buNone/>
-              <a:defRPr sz="1600">
+            <a:lvl9pPr marL="2194560" indent="0">
+              <a:buNone/>
+              <a:defRPr sz="960">
                 <a:solidFill>
                   <a:schemeClr val="tx1">
                     <a:tint val="82000"/>
@@ -1112,13 +989,7 @@
       </p:sp>
       <p:sp>
         <p:nvSpPr>
-          <p:cNvPr id="4" name="Date Placeholder 3">
-            <a:extLst>
-              <a:ext uri="{FF2B5EF4-FFF2-40B4-BE49-F238E27FC236}">
-                <a16:creationId xmlns:a16="http://schemas.microsoft.com/office/drawing/2014/main" id="{DA49F486-E420-8FBF-52F4-FBCFCBAB3ED5}"/>
-              </a:ext>
-            </a:extLst>
-          </p:cNvPr>
+          <p:cNvPr id="4" name="Date Placeholder 3"/>
           <p:cNvSpPr>
             <a:spLocks noGrp="1"/>
           </p:cNvSpPr>
@@ -1141,13 +1012,7 @@
       </p:sp>
       <p:sp>
         <p:nvSpPr>
-          <p:cNvPr id="5" name="Footer Placeholder 4">
-            <a:extLst>
-              <a:ext uri="{FF2B5EF4-FFF2-40B4-BE49-F238E27FC236}">
-                <a16:creationId xmlns:a16="http://schemas.microsoft.com/office/drawing/2014/main" id="{9560B67A-46BA-A617-2B13-CE82C8E04E95}"/>
-              </a:ext>
-            </a:extLst>
-          </p:cNvPr>
+          <p:cNvPr id="5" name="Footer Placeholder 4"/>
           <p:cNvSpPr>
             <a:spLocks noGrp="1"/>
           </p:cNvSpPr>
@@ -1166,13 +1031,7 @@
       </p:sp>
       <p:sp>
         <p:nvSpPr>
-          <p:cNvPr id="6" name="Slide Number Placeholder 5">
-            <a:extLst>
-              <a:ext uri="{FF2B5EF4-FFF2-40B4-BE49-F238E27FC236}">
-                <a16:creationId xmlns:a16="http://schemas.microsoft.com/office/drawing/2014/main" id="{E6E44D07-922F-008A-CE01-84384FD803C5}"/>
-              </a:ext>
-            </a:extLst>
-          </p:cNvPr>
+          <p:cNvPr id="6" name="Slide Number Placeholder 5"/>
           <p:cNvSpPr>
             <a:spLocks noGrp="1"/>
           </p:cNvSpPr>
@@ -1196,7 +1055,7 @@
     </p:spTree>
     <p:extLst>
       <p:ext uri="{BB962C8B-B14F-4D97-AF65-F5344CB8AC3E}">
-        <p14:creationId xmlns:p14="http://schemas.microsoft.com/office/powerpoint/2010/main" val="2098765914"/>
+        <p14:creationId xmlns:p14="http://schemas.microsoft.com/office/powerpoint/2010/main" val="3453874180"/>
       </p:ext>
     </p:extLst>
   </p:cSld>
@@ -1225,13 +1084,7 @@
       </p:grpSpPr>
       <p:sp>
         <p:nvSpPr>
-          <p:cNvPr id="2" name="Title 1">
-            <a:extLst>
-              <a:ext uri="{FF2B5EF4-FFF2-40B4-BE49-F238E27FC236}">
-                <a16:creationId xmlns:a16="http://schemas.microsoft.com/office/drawing/2014/main" id="{C4CBE48D-95D7-CCF6-15DD-2EA916D01362}"/>
-              </a:ext>
-            </a:extLst>
-          </p:cNvPr>
+          <p:cNvPr id="2" name="Title 1"/>
           <p:cNvSpPr>
             <a:spLocks noGrp="1"/>
           </p:cNvSpPr>
@@ -1248,18 +1101,13 @@
               <a:rPr lang="en-US"/>
               <a:t>Click to edit Master title style</a:t>
             </a:r>
-          </a:p>
-        </p:txBody>
-      </p:sp>
-      <p:sp>
-        <p:nvSpPr>
-          <p:cNvPr id="3" name="Content Placeholder 2">
-            <a:extLst>
-              <a:ext uri="{FF2B5EF4-FFF2-40B4-BE49-F238E27FC236}">
-                <a16:creationId xmlns:a16="http://schemas.microsoft.com/office/drawing/2014/main" id="{983EB023-1040-3A0C-319C-2D1EA35CF138}"/>
-              </a:ext>
-            </a:extLst>
-          </p:cNvPr>
+            <a:endParaRPr lang="en-US" dirty="0"/>
+          </a:p>
+        </p:txBody>
+      </p:sp>
+      <p:sp>
+        <p:nvSpPr>
+          <p:cNvPr id="3" name="Content Placeholder 2"/>
           <p:cNvSpPr>
             <a:spLocks noGrp="1"/>
           </p:cNvSpPr>
@@ -1269,8 +1117,8 @@
         </p:nvSpPr>
         <p:spPr>
           <a:xfrm>
-            <a:off x="838200" y="1825625"/>
-            <a:ext cx="5181600" cy="4351338"/>
+            <a:off x="1131570" y="1095375"/>
+            <a:ext cx="6995160" cy="2610803"/>
           </a:xfrm>
         </p:spPr>
         <p:txBody>
@@ -1310,18 +1158,13 @@
               <a:rPr lang="en-US"/>
               <a:t>Fifth level</a:t>
             </a:r>
-          </a:p>
-        </p:txBody>
-      </p:sp>
-      <p:sp>
-        <p:nvSpPr>
-          <p:cNvPr id="4" name="Content Placeholder 3">
-            <a:extLst>
-              <a:ext uri="{FF2B5EF4-FFF2-40B4-BE49-F238E27FC236}">
-                <a16:creationId xmlns:a16="http://schemas.microsoft.com/office/drawing/2014/main" id="{AC2278AC-9E46-C6E3-46C8-0255DFF26317}"/>
-              </a:ext>
-            </a:extLst>
-          </p:cNvPr>
+            <a:endParaRPr lang="en-US" dirty="0"/>
+          </a:p>
+        </p:txBody>
+      </p:sp>
+      <p:sp>
+        <p:nvSpPr>
+          <p:cNvPr id="4" name="Content Placeholder 3"/>
           <p:cNvSpPr>
             <a:spLocks noGrp="1"/>
           </p:cNvSpPr>
@@ -1331,8 +1174,8 @@
         </p:nvSpPr>
         <p:spPr>
           <a:xfrm>
-            <a:off x="6172200" y="1825625"/>
-            <a:ext cx="5181600" cy="4351338"/>
+            <a:off x="8332470" y="1095375"/>
+            <a:ext cx="6995160" cy="2610803"/>
           </a:xfrm>
         </p:spPr>
         <p:txBody>
@@ -1372,18 +1215,13 @@
               <a:rPr lang="en-US"/>
               <a:t>Fifth level</a:t>
             </a:r>
-          </a:p>
-        </p:txBody>
-      </p:sp>
-      <p:sp>
-        <p:nvSpPr>
-          <p:cNvPr id="5" name="Date Placeholder 4">
-            <a:extLst>
-              <a:ext uri="{FF2B5EF4-FFF2-40B4-BE49-F238E27FC236}">
-                <a16:creationId xmlns:a16="http://schemas.microsoft.com/office/drawing/2014/main" id="{6CAB75A3-C17E-AFA9-B8CB-E0FE9C25DD22}"/>
-              </a:ext>
-            </a:extLst>
-          </p:cNvPr>
+            <a:endParaRPr lang="en-US" dirty="0"/>
+          </a:p>
+        </p:txBody>
+      </p:sp>
+      <p:sp>
+        <p:nvSpPr>
+          <p:cNvPr id="5" name="Date Placeholder 4"/>
           <p:cNvSpPr>
             <a:spLocks noGrp="1"/>
           </p:cNvSpPr>
@@ -1406,13 +1244,7 @@
       </p:sp>
       <p:sp>
         <p:nvSpPr>
-          <p:cNvPr id="6" name="Footer Placeholder 5">
-            <a:extLst>
-              <a:ext uri="{FF2B5EF4-FFF2-40B4-BE49-F238E27FC236}">
-                <a16:creationId xmlns:a16="http://schemas.microsoft.com/office/drawing/2014/main" id="{74413744-8296-C59D-000B-5CFE10A235EB}"/>
-              </a:ext>
-            </a:extLst>
-          </p:cNvPr>
+          <p:cNvPr id="6" name="Footer Placeholder 5"/>
           <p:cNvSpPr>
             <a:spLocks noGrp="1"/>
           </p:cNvSpPr>
@@ -1431,13 +1263,7 @@
       </p:sp>
       <p:sp>
         <p:nvSpPr>
-          <p:cNvPr id="7" name="Slide Number Placeholder 6">
-            <a:extLst>
-              <a:ext uri="{FF2B5EF4-FFF2-40B4-BE49-F238E27FC236}">
-                <a16:creationId xmlns:a16="http://schemas.microsoft.com/office/drawing/2014/main" id="{665895E6-14DE-711D-2B5D-5ECE84470746}"/>
-              </a:ext>
-            </a:extLst>
-          </p:cNvPr>
+          <p:cNvPr id="7" name="Slide Number Placeholder 6"/>
           <p:cNvSpPr>
             <a:spLocks noGrp="1"/>
           </p:cNvSpPr>
@@ -1461,7 +1287,7 @@
     </p:spTree>
     <p:extLst>
       <p:ext uri="{BB962C8B-B14F-4D97-AF65-F5344CB8AC3E}">
-        <p14:creationId xmlns:p14="http://schemas.microsoft.com/office/powerpoint/2010/main" val="1421127999"/>
+        <p14:creationId xmlns:p14="http://schemas.microsoft.com/office/powerpoint/2010/main" val="495077577"/>
       </p:ext>
     </p:extLst>
   </p:cSld>
@@ -1490,13 +1316,7 @@
       </p:grpSpPr>
       <p:sp>
         <p:nvSpPr>
-          <p:cNvPr id="2" name="Title 1">
-            <a:extLst>
-              <a:ext uri="{FF2B5EF4-FFF2-40B4-BE49-F238E27FC236}">
-                <a16:creationId xmlns:a16="http://schemas.microsoft.com/office/drawing/2014/main" id="{0D41DF61-96E7-9A83-F5B2-4D60A83F27AC}"/>
-              </a:ext>
-            </a:extLst>
-          </p:cNvPr>
+          <p:cNvPr id="2" name="Title 1"/>
           <p:cNvSpPr>
             <a:spLocks noGrp="1"/>
           </p:cNvSpPr>
@@ -1506,8 +1326,8 @@
         </p:nvSpPr>
         <p:spPr>
           <a:xfrm>
-            <a:off x="839788" y="365125"/>
-            <a:ext cx="10515600" cy="1325563"/>
+            <a:off x="1133714" y="219075"/>
+            <a:ext cx="14196060" cy="795338"/>
           </a:xfrm>
         </p:spPr>
         <p:txBody>
@@ -1518,18 +1338,13 @@
               <a:rPr lang="en-US"/>
               <a:t>Click to edit Master title style</a:t>
             </a:r>
-          </a:p>
-        </p:txBody>
-      </p:sp>
-      <p:sp>
-        <p:nvSpPr>
-          <p:cNvPr id="3" name="Text Placeholder 2">
-            <a:extLst>
-              <a:ext uri="{FF2B5EF4-FFF2-40B4-BE49-F238E27FC236}">
-                <a16:creationId xmlns:a16="http://schemas.microsoft.com/office/drawing/2014/main" id="{00AF56A9-6E4E-E578-6AB0-0BC1C61E32A2}"/>
-              </a:ext>
-            </a:extLst>
-          </p:cNvPr>
+            <a:endParaRPr lang="en-US" dirty="0"/>
+          </a:p>
+        </p:txBody>
+      </p:sp>
+      <p:sp>
+        <p:nvSpPr>
+          <p:cNvPr id="3" name="Text Placeholder 2"/>
           <p:cNvSpPr>
             <a:spLocks noGrp="1"/>
           </p:cNvSpPr>
@@ -1539,8 +1354,8 @@
         </p:nvSpPr>
         <p:spPr>
           <a:xfrm>
-            <a:off x="839788" y="1681163"/>
-            <a:ext cx="5157787" cy="823912"/>
+            <a:off x="1133715" y="1008698"/>
+            <a:ext cx="6963012" cy="494347"/>
           </a:xfrm>
         </p:spPr>
         <p:txBody>
@@ -1548,39 +1363,39 @@
           <a:lstStyle>
             <a:lvl1pPr marL="0" indent="0">
               <a:buNone/>
-              <a:defRPr sz="2400" b="1"/>
+              <a:defRPr sz="1440" b="1"/>
             </a:lvl1pPr>
-            <a:lvl2pPr marL="457200" indent="0">
-              <a:buNone/>
-              <a:defRPr sz="2000" b="1"/>
+            <a:lvl2pPr marL="274320" indent="0">
+              <a:buNone/>
+              <a:defRPr sz="1200" b="1"/>
             </a:lvl2pPr>
-            <a:lvl3pPr marL="914400" indent="0">
-              <a:buNone/>
-              <a:defRPr sz="1800" b="1"/>
+            <a:lvl3pPr marL="548640" indent="0">
+              <a:buNone/>
+              <a:defRPr sz="1080" b="1"/>
             </a:lvl3pPr>
-            <a:lvl4pPr marL="1371600" indent="0">
-              <a:buNone/>
-              <a:defRPr sz="1600" b="1"/>
+            <a:lvl4pPr marL="822960" indent="0">
+              <a:buNone/>
+              <a:defRPr sz="960" b="1"/>
             </a:lvl4pPr>
-            <a:lvl5pPr marL="1828800" indent="0">
-              <a:buNone/>
-              <a:defRPr sz="1600" b="1"/>
+            <a:lvl5pPr marL="1097280" indent="0">
+              <a:buNone/>
+              <a:defRPr sz="960" b="1"/>
             </a:lvl5pPr>
-            <a:lvl6pPr marL="2286000" indent="0">
-              <a:buNone/>
-              <a:defRPr sz="1600" b="1"/>
+            <a:lvl6pPr marL="1371600" indent="0">
+              <a:buNone/>
+              <a:defRPr sz="960" b="1"/>
             </a:lvl6pPr>
-            <a:lvl7pPr marL="2743200" indent="0">
-              <a:buNone/>
-              <a:defRPr sz="1600" b="1"/>
+            <a:lvl7pPr marL="1645920" indent="0">
+              <a:buNone/>
+              <a:defRPr sz="960" b="1"/>
             </a:lvl7pPr>
-            <a:lvl8pPr marL="3200400" indent="0">
-              <a:buNone/>
-              <a:defRPr sz="1600" b="1"/>
+            <a:lvl8pPr marL="1920240" indent="0">
+              <a:buNone/>
+              <a:defRPr sz="960" b="1"/>
             </a:lvl8pPr>
-            <a:lvl9pPr marL="3657600" indent="0">
-              <a:buNone/>
-              <a:defRPr sz="1600" b="1"/>
+            <a:lvl9pPr marL="2194560" indent="0">
+              <a:buNone/>
+              <a:defRPr sz="960" b="1"/>
             </a:lvl9pPr>
           </a:lstStyle>
           <a:p>
@@ -1594,13 +1409,7 @@
       </p:sp>
       <p:sp>
         <p:nvSpPr>
-          <p:cNvPr id="4" name="Content Placeholder 3">
-            <a:extLst>
-              <a:ext uri="{FF2B5EF4-FFF2-40B4-BE49-F238E27FC236}">
-                <a16:creationId xmlns:a16="http://schemas.microsoft.com/office/drawing/2014/main" id="{0C492214-99B9-0932-57C4-8C6E64DD3B69}"/>
-              </a:ext>
-            </a:extLst>
-          </p:cNvPr>
+          <p:cNvPr id="4" name="Content Placeholder 3"/>
           <p:cNvSpPr>
             <a:spLocks noGrp="1"/>
           </p:cNvSpPr>
@@ -1610,8 +1419,8 @@
         </p:nvSpPr>
         <p:spPr>
           <a:xfrm>
-            <a:off x="839788" y="2505075"/>
-            <a:ext cx="5157787" cy="3684588"/>
+            <a:off x="1133715" y="1503045"/>
+            <a:ext cx="6963012" cy="2210753"/>
           </a:xfrm>
         </p:spPr>
         <p:txBody>
@@ -1651,18 +1460,13 @@
               <a:rPr lang="en-US"/>
               <a:t>Fifth level</a:t>
             </a:r>
-          </a:p>
-        </p:txBody>
-      </p:sp>
-      <p:sp>
-        <p:nvSpPr>
-          <p:cNvPr id="5" name="Text Placeholder 4">
-            <a:extLst>
-              <a:ext uri="{FF2B5EF4-FFF2-40B4-BE49-F238E27FC236}">
-                <a16:creationId xmlns:a16="http://schemas.microsoft.com/office/drawing/2014/main" id="{A015F2AB-46E7-29C6-432F-81D27C883E86}"/>
-              </a:ext>
-            </a:extLst>
-          </p:cNvPr>
+            <a:endParaRPr lang="en-US" dirty="0"/>
+          </a:p>
+        </p:txBody>
+      </p:sp>
+      <p:sp>
+        <p:nvSpPr>
+          <p:cNvPr id="5" name="Text Placeholder 4"/>
           <p:cNvSpPr>
             <a:spLocks noGrp="1"/>
           </p:cNvSpPr>
@@ -1672,8 +1476,8 @@
         </p:nvSpPr>
         <p:spPr>
           <a:xfrm>
-            <a:off x="6172200" y="1681163"/>
-            <a:ext cx="5183188" cy="823912"/>
+            <a:off x="8332470" y="1008698"/>
+            <a:ext cx="6997304" cy="494347"/>
           </a:xfrm>
         </p:spPr>
         <p:txBody>
@@ -1681,39 +1485,39 @@
           <a:lstStyle>
             <a:lvl1pPr marL="0" indent="0">
               <a:buNone/>
-              <a:defRPr sz="2400" b="1"/>
+              <a:defRPr sz="1440" b="1"/>
             </a:lvl1pPr>
-            <a:lvl2pPr marL="457200" indent="0">
-              <a:buNone/>
-              <a:defRPr sz="2000" b="1"/>
+            <a:lvl2pPr marL="274320" indent="0">
+              <a:buNone/>
+              <a:defRPr sz="1200" b="1"/>
             </a:lvl2pPr>
-            <a:lvl3pPr marL="914400" indent="0">
-              <a:buNone/>
-              <a:defRPr sz="1800" b="1"/>
+            <a:lvl3pPr marL="548640" indent="0">
+              <a:buNone/>
+              <a:defRPr sz="1080" b="1"/>
             </a:lvl3pPr>
-            <a:lvl4pPr marL="1371600" indent="0">
-              <a:buNone/>
-              <a:defRPr sz="1600" b="1"/>
+            <a:lvl4pPr marL="822960" indent="0">
+              <a:buNone/>
+              <a:defRPr sz="960" b="1"/>
             </a:lvl4pPr>
-            <a:lvl5pPr marL="1828800" indent="0">
-              <a:buNone/>
-              <a:defRPr sz="1600" b="1"/>
+            <a:lvl5pPr marL="1097280" indent="0">
+              <a:buNone/>
+              <a:defRPr sz="960" b="1"/>
             </a:lvl5pPr>
-            <a:lvl6pPr marL="2286000" indent="0">
-              <a:buNone/>
-              <a:defRPr sz="1600" b="1"/>
+            <a:lvl6pPr marL="1371600" indent="0">
+              <a:buNone/>
+              <a:defRPr sz="960" b="1"/>
             </a:lvl6pPr>
-            <a:lvl7pPr marL="2743200" indent="0">
-              <a:buNone/>
-              <a:defRPr sz="1600" b="1"/>
+            <a:lvl7pPr marL="1645920" indent="0">
+              <a:buNone/>
+              <a:defRPr sz="960" b="1"/>
             </a:lvl7pPr>
-            <a:lvl8pPr marL="3200400" indent="0">
-              <a:buNone/>
-              <a:defRPr sz="1600" b="1"/>
+            <a:lvl8pPr marL="1920240" indent="0">
+              <a:buNone/>
+              <a:defRPr sz="960" b="1"/>
             </a:lvl8pPr>
-            <a:lvl9pPr marL="3657600" indent="0">
-              <a:buNone/>
-              <a:defRPr sz="1600" b="1"/>
+            <a:lvl9pPr marL="2194560" indent="0">
+              <a:buNone/>
+              <a:defRPr sz="960" b="1"/>
             </a:lvl9pPr>
           </a:lstStyle>
           <a:p>
@@ -1727,13 +1531,7 @@
       </p:sp>
       <p:sp>
         <p:nvSpPr>
-          <p:cNvPr id="6" name="Content Placeholder 5">
-            <a:extLst>
-              <a:ext uri="{FF2B5EF4-FFF2-40B4-BE49-F238E27FC236}">
-                <a16:creationId xmlns:a16="http://schemas.microsoft.com/office/drawing/2014/main" id="{C2E7305B-456B-BA94-ACA7-C6733A8C5BB6}"/>
-              </a:ext>
-            </a:extLst>
-          </p:cNvPr>
+          <p:cNvPr id="6" name="Content Placeholder 5"/>
           <p:cNvSpPr>
             <a:spLocks noGrp="1"/>
           </p:cNvSpPr>
@@ -1743,8 +1541,8 @@
         </p:nvSpPr>
         <p:spPr>
           <a:xfrm>
-            <a:off x="6172200" y="2505075"/>
-            <a:ext cx="5183188" cy="3684588"/>
+            <a:off x="8332470" y="1503045"/>
+            <a:ext cx="6997304" cy="2210753"/>
           </a:xfrm>
         </p:spPr>
         <p:txBody>
@@ -1784,18 +1582,13 @@
               <a:rPr lang="en-US"/>
               <a:t>Fifth level</a:t>
             </a:r>
-          </a:p>
-        </p:txBody>
-      </p:sp>
-      <p:sp>
-        <p:nvSpPr>
-          <p:cNvPr id="7" name="Date Placeholder 6">
-            <a:extLst>
-              <a:ext uri="{FF2B5EF4-FFF2-40B4-BE49-F238E27FC236}">
-                <a16:creationId xmlns:a16="http://schemas.microsoft.com/office/drawing/2014/main" id="{10E83CD9-E336-34A9-A6AE-C4267FC1F55F}"/>
-              </a:ext>
-            </a:extLst>
-          </p:cNvPr>
+            <a:endParaRPr lang="en-US" dirty="0"/>
+          </a:p>
+        </p:txBody>
+      </p:sp>
+      <p:sp>
+        <p:nvSpPr>
+          <p:cNvPr id="7" name="Date Placeholder 6"/>
           <p:cNvSpPr>
             <a:spLocks noGrp="1"/>
           </p:cNvSpPr>
@@ -1818,13 +1611,7 @@
       </p:sp>
       <p:sp>
         <p:nvSpPr>
-          <p:cNvPr id="8" name="Footer Placeholder 7">
-            <a:extLst>
-              <a:ext uri="{FF2B5EF4-FFF2-40B4-BE49-F238E27FC236}">
-                <a16:creationId xmlns:a16="http://schemas.microsoft.com/office/drawing/2014/main" id="{6E925D39-F6EA-1823-57E0-254212FAFD3E}"/>
-              </a:ext>
-            </a:extLst>
-          </p:cNvPr>
+          <p:cNvPr id="8" name="Footer Placeholder 7"/>
           <p:cNvSpPr>
             <a:spLocks noGrp="1"/>
           </p:cNvSpPr>
@@ -1843,13 +1630,7 @@
       </p:sp>
       <p:sp>
         <p:nvSpPr>
-          <p:cNvPr id="9" name="Slide Number Placeholder 8">
-            <a:extLst>
-              <a:ext uri="{FF2B5EF4-FFF2-40B4-BE49-F238E27FC236}">
-                <a16:creationId xmlns:a16="http://schemas.microsoft.com/office/drawing/2014/main" id="{D63575D1-8EF5-BD45-F532-4CB9B59690D8}"/>
-              </a:ext>
-            </a:extLst>
-          </p:cNvPr>
+          <p:cNvPr id="9" name="Slide Number Placeholder 8"/>
           <p:cNvSpPr>
             <a:spLocks noGrp="1"/>
           </p:cNvSpPr>
@@ -1873,7 +1654,7 @@
     </p:spTree>
     <p:extLst>
       <p:ext uri="{BB962C8B-B14F-4D97-AF65-F5344CB8AC3E}">
-        <p14:creationId xmlns:p14="http://schemas.microsoft.com/office/powerpoint/2010/main" val="32951404"/>
+        <p14:creationId xmlns:p14="http://schemas.microsoft.com/office/powerpoint/2010/main" val="4183820994"/>
       </p:ext>
     </p:extLst>
   </p:cSld>
@@ -1902,13 +1683,7 @@
       </p:grpSpPr>
       <p:sp>
         <p:nvSpPr>
-          <p:cNvPr id="2" name="Title 1">
-            <a:extLst>
-              <a:ext uri="{FF2B5EF4-FFF2-40B4-BE49-F238E27FC236}">
-                <a16:creationId xmlns:a16="http://schemas.microsoft.com/office/drawing/2014/main" id="{63411A0B-00E7-3817-971A-4B2B1A7A0DA0}"/>
-              </a:ext>
-            </a:extLst>
-          </p:cNvPr>
+          <p:cNvPr id="2" name="Title 1"/>
           <p:cNvSpPr>
             <a:spLocks noGrp="1"/>
           </p:cNvSpPr>
@@ -1925,18 +1700,13 @@
               <a:rPr lang="en-US"/>
               <a:t>Click to edit Master title style</a:t>
             </a:r>
-          </a:p>
-        </p:txBody>
-      </p:sp>
-      <p:sp>
-        <p:nvSpPr>
-          <p:cNvPr id="3" name="Date Placeholder 2">
-            <a:extLst>
-              <a:ext uri="{FF2B5EF4-FFF2-40B4-BE49-F238E27FC236}">
-                <a16:creationId xmlns:a16="http://schemas.microsoft.com/office/drawing/2014/main" id="{0EA0FAA6-8CC1-EA38-E048-BF9BFEE21A2B}"/>
-              </a:ext>
-            </a:extLst>
-          </p:cNvPr>
+            <a:endParaRPr lang="en-US" dirty="0"/>
+          </a:p>
+        </p:txBody>
+      </p:sp>
+      <p:sp>
+        <p:nvSpPr>
+          <p:cNvPr id="3" name="Date Placeholder 2"/>
           <p:cNvSpPr>
             <a:spLocks noGrp="1"/>
           </p:cNvSpPr>
@@ -1959,13 +1729,7 @@
       </p:sp>
       <p:sp>
         <p:nvSpPr>
-          <p:cNvPr id="4" name="Footer Placeholder 3">
-            <a:extLst>
-              <a:ext uri="{FF2B5EF4-FFF2-40B4-BE49-F238E27FC236}">
-                <a16:creationId xmlns:a16="http://schemas.microsoft.com/office/drawing/2014/main" id="{17EE9DFD-37D5-4E56-79D1-3770AA77ED35}"/>
-              </a:ext>
-            </a:extLst>
-          </p:cNvPr>
+          <p:cNvPr id="4" name="Footer Placeholder 3"/>
           <p:cNvSpPr>
             <a:spLocks noGrp="1"/>
           </p:cNvSpPr>
@@ -1984,13 +1748,7 @@
       </p:sp>
       <p:sp>
         <p:nvSpPr>
-          <p:cNvPr id="5" name="Slide Number Placeholder 4">
-            <a:extLst>
-              <a:ext uri="{FF2B5EF4-FFF2-40B4-BE49-F238E27FC236}">
-                <a16:creationId xmlns:a16="http://schemas.microsoft.com/office/drawing/2014/main" id="{1F20640C-1A4F-84A0-63CE-80894B03FA31}"/>
-              </a:ext>
-            </a:extLst>
-          </p:cNvPr>
+          <p:cNvPr id="5" name="Slide Number Placeholder 4"/>
           <p:cNvSpPr>
             <a:spLocks noGrp="1"/>
           </p:cNvSpPr>
@@ -2014,7 +1772,7 @@
     </p:spTree>
     <p:extLst>
       <p:ext uri="{BB962C8B-B14F-4D97-AF65-F5344CB8AC3E}">
-        <p14:creationId xmlns:p14="http://schemas.microsoft.com/office/powerpoint/2010/main" val="3020985722"/>
+        <p14:creationId xmlns:p14="http://schemas.microsoft.com/office/powerpoint/2010/main" val="2404889437"/>
       </p:ext>
     </p:extLst>
   </p:cSld>
@@ -2043,13 +1801,7 @@
       </p:grpSpPr>
       <p:sp>
         <p:nvSpPr>
-          <p:cNvPr id="2" name="Date Placeholder 1">
-            <a:extLst>
-              <a:ext uri="{FF2B5EF4-FFF2-40B4-BE49-F238E27FC236}">
-                <a16:creationId xmlns:a16="http://schemas.microsoft.com/office/drawing/2014/main" id="{7BC83091-6A56-CD43-5161-1DFED9CFF908}"/>
-              </a:ext>
-            </a:extLst>
-          </p:cNvPr>
+          <p:cNvPr id="2" name="Date Placeholder 1"/>
           <p:cNvSpPr>
             <a:spLocks noGrp="1"/>
           </p:cNvSpPr>
@@ -2072,13 +1824,7 @@
       </p:sp>
       <p:sp>
         <p:nvSpPr>
-          <p:cNvPr id="3" name="Footer Placeholder 2">
-            <a:extLst>
-              <a:ext uri="{FF2B5EF4-FFF2-40B4-BE49-F238E27FC236}">
-                <a16:creationId xmlns:a16="http://schemas.microsoft.com/office/drawing/2014/main" id="{7D2CC696-B9FC-BB00-F2D0-9DED37BA621E}"/>
-              </a:ext>
-            </a:extLst>
-          </p:cNvPr>
+          <p:cNvPr id="3" name="Footer Placeholder 2"/>
           <p:cNvSpPr>
             <a:spLocks noGrp="1"/>
           </p:cNvSpPr>
@@ -2097,13 +1843,7 @@
       </p:sp>
       <p:sp>
         <p:nvSpPr>
-          <p:cNvPr id="4" name="Slide Number Placeholder 3">
-            <a:extLst>
-              <a:ext uri="{FF2B5EF4-FFF2-40B4-BE49-F238E27FC236}">
-                <a16:creationId xmlns:a16="http://schemas.microsoft.com/office/drawing/2014/main" id="{93C94668-2649-8F42-FDD7-AA19FDAF2F9A}"/>
-              </a:ext>
-            </a:extLst>
-          </p:cNvPr>
+          <p:cNvPr id="4" name="Slide Number Placeholder 3"/>
           <p:cNvSpPr>
             <a:spLocks noGrp="1"/>
           </p:cNvSpPr>
@@ -2127,7 +1867,7 @@
     </p:spTree>
     <p:extLst>
       <p:ext uri="{BB962C8B-B14F-4D97-AF65-F5344CB8AC3E}">
-        <p14:creationId xmlns:p14="http://schemas.microsoft.com/office/powerpoint/2010/main" val="4217532333"/>
+        <p14:creationId xmlns:p14="http://schemas.microsoft.com/office/powerpoint/2010/main" val="954719711"/>
       </p:ext>
     </p:extLst>
   </p:cSld>
@@ -2156,13 +1896,7 @@
       </p:grpSpPr>
       <p:sp>
         <p:nvSpPr>
-          <p:cNvPr id="2" name="Title 1">
-            <a:extLst>
-              <a:ext uri="{FF2B5EF4-FFF2-40B4-BE49-F238E27FC236}">
-                <a16:creationId xmlns:a16="http://schemas.microsoft.com/office/drawing/2014/main" id="{17C3ECB6-3D28-9236-1B4A-052482F6A998}"/>
-              </a:ext>
-            </a:extLst>
-          </p:cNvPr>
+          <p:cNvPr id="2" name="Title 1"/>
           <p:cNvSpPr>
             <a:spLocks noGrp="1"/>
           </p:cNvSpPr>
@@ -2172,15 +1906,15 @@
         </p:nvSpPr>
         <p:spPr>
           <a:xfrm>
-            <a:off x="839788" y="457200"/>
-            <a:ext cx="3932237" cy="1600200"/>
+            <a:off x="1133714" y="274320"/>
+            <a:ext cx="5308520" cy="960120"/>
           </a:xfrm>
         </p:spPr>
         <p:txBody>
           <a:bodyPr anchor="b"/>
           <a:lstStyle>
             <a:lvl1pPr>
-              <a:defRPr sz="3200"/>
+              <a:defRPr sz="1920"/>
             </a:lvl1pPr>
           </a:lstStyle>
           <a:p>
@@ -2188,18 +1922,13 @@
               <a:rPr lang="en-US"/>
               <a:t>Click to edit Master title style</a:t>
             </a:r>
-          </a:p>
-        </p:txBody>
-      </p:sp>
-      <p:sp>
-        <p:nvSpPr>
-          <p:cNvPr id="3" name="Content Placeholder 2">
-            <a:extLst>
-              <a:ext uri="{FF2B5EF4-FFF2-40B4-BE49-F238E27FC236}">
-                <a16:creationId xmlns:a16="http://schemas.microsoft.com/office/drawing/2014/main" id="{A46727F4-B1FF-E83A-3896-0E8C5DDEABC8}"/>
-              </a:ext>
-            </a:extLst>
-          </p:cNvPr>
+            <a:endParaRPr lang="en-US" dirty="0"/>
+          </a:p>
+        </p:txBody>
+      </p:sp>
+      <p:sp>
+        <p:nvSpPr>
+          <p:cNvPr id="3" name="Content Placeholder 2"/>
           <p:cNvSpPr>
             <a:spLocks noGrp="1"/>
           </p:cNvSpPr>
@@ -2209,39 +1938,39 @@
         </p:nvSpPr>
         <p:spPr>
           <a:xfrm>
-            <a:off x="5183188" y="987425"/>
-            <a:ext cx="6172200" cy="4873625"/>
+            <a:off x="6997304" y="592455"/>
+            <a:ext cx="8332470" cy="2924175"/>
           </a:xfrm>
         </p:spPr>
         <p:txBody>
           <a:bodyPr/>
           <a:lstStyle>
             <a:lvl1pPr>
-              <a:defRPr sz="3200"/>
+              <a:defRPr sz="1920"/>
             </a:lvl1pPr>
             <a:lvl2pPr>
-              <a:defRPr sz="2800"/>
+              <a:defRPr sz="1680"/>
             </a:lvl2pPr>
             <a:lvl3pPr>
-              <a:defRPr sz="2400"/>
+              <a:defRPr sz="1440"/>
             </a:lvl3pPr>
             <a:lvl4pPr>
-              <a:defRPr sz="2000"/>
+              <a:defRPr sz="1200"/>
             </a:lvl4pPr>
             <a:lvl5pPr>
-              <a:defRPr sz="2000"/>
+              <a:defRPr sz="1200"/>
             </a:lvl5pPr>
             <a:lvl6pPr>
-              <a:defRPr sz="2000"/>
+              <a:defRPr sz="1200"/>
             </a:lvl6pPr>
             <a:lvl7pPr>
-              <a:defRPr sz="2000"/>
+              <a:defRPr sz="1200"/>
             </a:lvl7pPr>
             <a:lvl8pPr>
-              <a:defRPr sz="2000"/>
+              <a:defRPr sz="1200"/>
             </a:lvl8pPr>
             <a:lvl9pPr>
-              <a:defRPr sz="2000"/>
+              <a:defRPr sz="1200"/>
             </a:lvl9pPr>
           </a:lstStyle>
           <a:p>
@@ -2278,18 +2007,13 @@
               <a:rPr lang="en-US"/>
               <a:t>Fifth level</a:t>
             </a:r>
-          </a:p>
-        </p:txBody>
-      </p:sp>
-      <p:sp>
-        <p:nvSpPr>
-          <p:cNvPr id="4" name="Text Placeholder 3">
-            <a:extLst>
-              <a:ext uri="{FF2B5EF4-FFF2-40B4-BE49-F238E27FC236}">
-                <a16:creationId xmlns:a16="http://schemas.microsoft.com/office/drawing/2014/main" id="{1B7F8DEE-F057-AC35-A5F8-FB56C1DA44BC}"/>
-              </a:ext>
-            </a:extLst>
-          </p:cNvPr>
+            <a:endParaRPr lang="en-US" dirty="0"/>
+          </a:p>
+        </p:txBody>
+      </p:sp>
+      <p:sp>
+        <p:nvSpPr>
+          <p:cNvPr id="4" name="Text Placeholder 3"/>
           <p:cNvSpPr>
             <a:spLocks noGrp="1"/>
           </p:cNvSpPr>
@@ -2299,8 +2023,8 @@
         </p:nvSpPr>
         <p:spPr>
           <a:xfrm>
-            <a:off x="839788" y="2057400"/>
-            <a:ext cx="3932237" cy="3811588"/>
+            <a:off x="1133714" y="1234440"/>
+            <a:ext cx="5308520" cy="2286953"/>
           </a:xfrm>
         </p:spPr>
         <p:txBody>
@@ -2308,39 +2032,39 @@
           <a:lstStyle>
             <a:lvl1pPr marL="0" indent="0">
               <a:buNone/>
-              <a:defRPr sz="1600"/>
+              <a:defRPr sz="960"/>
             </a:lvl1pPr>
-            <a:lvl2pPr marL="457200" indent="0">
-              <a:buNone/>
-              <a:defRPr sz="1400"/>
+            <a:lvl2pPr marL="274320" indent="0">
+              <a:buNone/>
+              <a:defRPr sz="840"/>
             </a:lvl2pPr>
-            <a:lvl3pPr marL="914400" indent="0">
-              <a:buNone/>
-              <a:defRPr sz="1200"/>
+            <a:lvl3pPr marL="548640" indent="0">
+              <a:buNone/>
+              <a:defRPr sz="720"/>
             </a:lvl3pPr>
-            <a:lvl4pPr marL="1371600" indent="0">
-              <a:buNone/>
-              <a:defRPr sz="1000"/>
+            <a:lvl4pPr marL="822960" indent="0">
+              <a:buNone/>
+              <a:defRPr sz="600"/>
             </a:lvl4pPr>
-            <a:lvl5pPr marL="1828800" indent="0">
-              <a:buNone/>
-              <a:defRPr sz="1000"/>
+            <a:lvl5pPr marL="1097280" indent="0">
+              <a:buNone/>
+              <a:defRPr sz="600"/>
             </a:lvl5pPr>
-            <a:lvl6pPr marL="2286000" indent="0">
-              <a:buNone/>
-              <a:defRPr sz="1000"/>
+            <a:lvl6pPr marL="1371600" indent="0">
+              <a:buNone/>
+              <a:defRPr sz="600"/>
             </a:lvl6pPr>
-            <a:lvl7pPr marL="2743200" indent="0">
-              <a:buNone/>
-              <a:defRPr sz="1000"/>
+            <a:lvl7pPr marL="1645920" indent="0">
+              <a:buNone/>
+              <a:defRPr sz="600"/>
             </a:lvl7pPr>
-            <a:lvl8pPr marL="3200400" indent="0">
-              <a:buNone/>
-              <a:defRPr sz="1000"/>
+            <a:lvl8pPr marL="1920240" indent="0">
+              <a:buNone/>
+              <a:defRPr sz="600"/>
             </a:lvl8pPr>
-            <a:lvl9pPr marL="3657600" indent="0">
-              <a:buNone/>
-              <a:defRPr sz="1000"/>
+            <a:lvl9pPr marL="2194560" indent="0">
+              <a:buNone/>
+              <a:defRPr sz="600"/>
             </a:lvl9pPr>
           </a:lstStyle>
           <a:p>
@@ -2354,13 +2078,7 @@
       </p:sp>
       <p:sp>
         <p:nvSpPr>
-          <p:cNvPr id="5" name="Date Placeholder 4">
-            <a:extLst>
-              <a:ext uri="{FF2B5EF4-FFF2-40B4-BE49-F238E27FC236}">
-                <a16:creationId xmlns:a16="http://schemas.microsoft.com/office/drawing/2014/main" id="{DB09AB5E-EB07-7F87-429C-F6368A5DFE01}"/>
-              </a:ext>
-            </a:extLst>
-          </p:cNvPr>
+          <p:cNvPr id="5" name="Date Placeholder 4"/>
           <p:cNvSpPr>
             <a:spLocks noGrp="1"/>
           </p:cNvSpPr>
@@ -2383,13 +2101,7 @@
       </p:sp>
       <p:sp>
         <p:nvSpPr>
-          <p:cNvPr id="6" name="Footer Placeholder 5">
-            <a:extLst>
-              <a:ext uri="{FF2B5EF4-FFF2-40B4-BE49-F238E27FC236}">
-                <a16:creationId xmlns:a16="http://schemas.microsoft.com/office/drawing/2014/main" id="{7F2452E0-3D81-38D2-0A17-0FBBB963D0B7}"/>
-              </a:ext>
-            </a:extLst>
-          </p:cNvPr>
+          <p:cNvPr id="6" name="Footer Placeholder 5"/>
           <p:cNvSpPr>
             <a:spLocks noGrp="1"/>
           </p:cNvSpPr>
@@ -2408,13 +2120,7 @@
       </p:sp>
       <p:sp>
         <p:nvSpPr>
-          <p:cNvPr id="7" name="Slide Number Placeholder 6">
-            <a:extLst>
-              <a:ext uri="{FF2B5EF4-FFF2-40B4-BE49-F238E27FC236}">
-                <a16:creationId xmlns:a16="http://schemas.microsoft.com/office/drawing/2014/main" id="{C1327438-7EDF-B634-1D2A-9FC73A776460}"/>
-              </a:ext>
-            </a:extLst>
-          </p:cNvPr>
+          <p:cNvPr id="7" name="Slide Number Placeholder 6"/>
           <p:cNvSpPr>
             <a:spLocks noGrp="1"/>
           </p:cNvSpPr>
@@ -2438,7 +2144,7 @@
     </p:spTree>
     <p:extLst>
       <p:ext uri="{BB962C8B-B14F-4D97-AF65-F5344CB8AC3E}">
-        <p14:creationId xmlns:p14="http://schemas.microsoft.com/office/powerpoint/2010/main" val="671968311"/>
+        <p14:creationId xmlns:p14="http://schemas.microsoft.com/office/powerpoint/2010/main" val="2795653300"/>
       </p:ext>
     </p:extLst>
   </p:cSld>
@@ -2467,13 +2173,7 @@
       </p:grpSpPr>
       <p:sp>
         <p:nvSpPr>
-          <p:cNvPr id="2" name="Title 1">
-            <a:extLst>
-              <a:ext uri="{FF2B5EF4-FFF2-40B4-BE49-F238E27FC236}">
-                <a16:creationId xmlns:a16="http://schemas.microsoft.com/office/drawing/2014/main" id="{B813CEE6-BC3A-A27D-CF78-D5302CE673C6}"/>
-              </a:ext>
-            </a:extLst>
-          </p:cNvPr>
+          <p:cNvPr id="2" name="Title 1"/>
           <p:cNvSpPr>
             <a:spLocks noGrp="1"/>
           </p:cNvSpPr>
@@ -2483,15 +2183,15 @@
         </p:nvSpPr>
         <p:spPr>
           <a:xfrm>
-            <a:off x="839788" y="457200"/>
-            <a:ext cx="3932237" cy="1600200"/>
+            <a:off x="1133714" y="274320"/>
+            <a:ext cx="5308520" cy="960120"/>
           </a:xfrm>
         </p:spPr>
         <p:txBody>
           <a:bodyPr anchor="b"/>
           <a:lstStyle>
             <a:lvl1pPr>
-              <a:defRPr sz="3200"/>
+              <a:defRPr sz="1920"/>
             </a:lvl1pPr>
           </a:lstStyle>
           <a:p>
@@ -2499,20 +2199,15 @@
               <a:rPr lang="en-US"/>
               <a:t>Click to edit Master title style</a:t>
             </a:r>
-          </a:p>
-        </p:txBody>
-      </p:sp>
-      <p:sp>
-        <p:nvSpPr>
-          <p:cNvPr id="3" name="Picture Placeholder 2">
-            <a:extLst>
-              <a:ext uri="{FF2B5EF4-FFF2-40B4-BE49-F238E27FC236}">
-                <a16:creationId xmlns:a16="http://schemas.microsoft.com/office/drawing/2014/main" id="{13D0E2E4-0641-80E1-0B1D-D00B47E569CE}"/>
-              </a:ext>
-            </a:extLst>
-          </p:cNvPr>
-          <p:cNvSpPr>
-            <a:spLocks noGrp="1"/>
+            <a:endParaRPr lang="en-US" dirty="0"/>
+          </a:p>
+        </p:txBody>
+      </p:sp>
+      <p:sp>
+        <p:nvSpPr>
+          <p:cNvPr id="3" name="Picture Placeholder 2"/>
+          <p:cNvSpPr>
+            <a:spLocks noGrp="1" noChangeAspect="1"/>
           </p:cNvSpPr>
           <p:nvPr>
             <p:ph type="pic" idx="1"/>
@@ -2520,64 +2215,62 @@
         </p:nvSpPr>
         <p:spPr>
           <a:xfrm>
-            <a:off x="5183188" y="987425"/>
-            <a:ext cx="6172200" cy="4873625"/>
-          </a:xfrm>
-        </p:spPr>
-        <p:txBody>
-          <a:bodyPr/>
+            <a:off x="6997304" y="592455"/>
+            <a:ext cx="8332470" cy="2924175"/>
+          </a:xfrm>
+        </p:spPr>
+        <p:txBody>
+          <a:bodyPr anchor="t"/>
           <a:lstStyle>
             <a:lvl1pPr marL="0" indent="0">
               <a:buNone/>
-              <a:defRPr sz="3200"/>
+              <a:defRPr sz="1920"/>
             </a:lvl1pPr>
-            <a:lvl2pPr marL="457200" indent="0">
-              <a:buNone/>
-              <a:defRPr sz="2800"/>
+            <a:lvl2pPr marL="274320" indent="0">
+              <a:buNone/>
+              <a:defRPr sz="1680"/>
             </a:lvl2pPr>
-            <a:lvl3pPr marL="914400" indent="0">
-              <a:buNone/>
-              <a:defRPr sz="2400"/>
+            <a:lvl3pPr marL="548640" indent="0">
+              <a:buNone/>
+              <a:defRPr sz="1440"/>
             </a:lvl3pPr>
-            <a:lvl4pPr marL="1371600" indent="0">
-              <a:buNone/>
-              <a:defRPr sz="2000"/>
+            <a:lvl4pPr marL="822960" indent="0">
+              <a:buNone/>
+              <a:defRPr sz="1200"/>
             </a:lvl4pPr>
-            <a:lvl5pPr marL="1828800" indent="0">
-              <a:buNone/>
-              <a:defRPr sz="2000"/>
+            <a:lvl5pPr marL="1097280" indent="0">
+              <a:buNone/>
+              <a:defRPr sz="1200"/>
             </a:lvl5pPr>
-            <a:lvl6pPr marL="2286000" indent="0">
-              <a:buNone/>
-              <a:defRPr sz="2000"/>
+            <a:lvl6pPr marL="1371600" indent="0">
+              <a:buNone/>
+              <a:defRPr sz="1200"/>
             </a:lvl6pPr>
-            <a:lvl7pPr marL="2743200" indent="0">
-              <a:buNone/>
-              <a:defRPr sz="2000"/>
+            <a:lvl7pPr marL="1645920" indent="0">
+              <a:buNone/>
+              <a:defRPr sz="1200"/>
             </a:lvl7pPr>
-            <a:lvl8pPr marL="3200400" indent="0">
-              <a:buNone/>
-              <a:defRPr sz="2000"/>
+            <a:lvl8pPr marL="1920240" indent="0">
+              <a:buNone/>
+              <a:defRPr sz="1200"/>
             </a:lvl8pPr>
-            <a:lvl9pPr marL="3657600" indent="0">
-              <a:buNone/>
-              <a:defRPr sz="2000"/>
+            <a:lvl9pPr marL="2194560" indent="0">
+              <a:buNone/>
+              <a:defRPr sz="1200"/>
             </a:lvl9pPr>
           </a:lstStyle>
           <a:p>
-            <a:endParaRPr lang="en-US"/>
-          </a:p>
-        </p:txBody>
-      </p:sp>
-      <p:sp>
-        <p:nvSpPr>
-          <p:cNvPr id="4" name="Text Placeholder 3">
-            <a:extLst>
-              <a:ext uri="{FF2B5EF4-FFF2-40B4-BE49-F238E27FC236}">
-                <a16:creationId xmlns:a16="http://schemas.microsoft.com/office/drawing/2014/main" id="{F4BE87DE-239E-5689-9FC2-18484F638F4D}"/>
-              </a:ext>
-            </a:extLst>
-          </p:cNvPr>
+            <a:r>
+              <a:rPr lang="en-US"/>
+              <a:t>Click icon to add picture</a:t>
+            </a:r>
+            <a:endParaRPr lang="en-US" dirty="0"/>
+          </a:p>
+        </p:txBody>
+      </p:sp>
+      <p:sp>
+        <p:nvSpPr>
+          <p:cNvPr id="4" name="Text Placeholder 3"/>
           <p:cNvSpPr>
             <a:spLocks noGrp="1"/>
           </p:cNvSpPr>
@@ -2587,8 +2280,8 @@
         </p:nvSpPr>
         <p:spPr>
           <a:xfrm>
-            <a:off x="839788" y="2057400"/>
-            <a:ext cx="3932237" cy="3811588"/>
+            <a:off x="1133714" y="1234440"/>
+            <a:ext cx="5308520" cy="2286953"/>
           </a:xfrm>
         </p:spPr>
         <p:txBody>
@@ -2596,39 +2289,39 @@
           <a:lstStyle>
             <a:lvl1pPr marL="0" indent="0">
               <a:buNone/>
-              <a:defRPr sz="1600"/>
+              <a:defRPr sz="960"/>
             </a:lvl1pPr>
-            <a:lvl2pPr marL="457200" indent="0">
-              <a:buNone/>
-              <a:defRPr sz="1400"/>
+            <a:lvl2pPr marL="274320" indent="0">
+              <a:buNone/>
+              <a:defRPr sz="840"/>
             </a:lvl2pPr>
-            <a:lvl3pPr marL="914400" indent="0">
-              <a:buNone/>
-              <a:defRPr sz="1200"/>
+            <a:lvl3pPr marL="548640" indent="0">
+              <a:buNone/>
+              <a:defRPr sz="720"/>
             </a:lvl3pPr>
-            <a:lvl4pPr marL="1371600" indent="0">
-              <a:buNone/>
-              <a:defRPr sz="1000"/>
+            <a:lvl4pPr marL="822960" indent="0">
+              <a:buNone/>
+              <a:defRPr sz="600"/>
             </a:lvl4pPr>
-            <a:lvl5pPr marL="1828800" indent="0">
-              <a:buNone/>
-              <a:defRPr sz="1000"/>
+            <a:lvl5pPr marL="1097280" indent="0">
+              <a:buNone/>
+              <a:defRPr sz="600"/>
             </a:lvl5pPr>
-            <a:lvl6pPr marL="2286000" indent="0">
-              <a:buNone/>
-              <a:defRPr sz="1000"/>
+            <a:lvl6pPr marL="1371600" indent="0">
+              <a:buNone/>
+              <a:defRPr sz="600"/>
             </a:lvl6pPr>
-            <a:lvl7pPr marL="2743200" indent="0">
-              <a:buNone/>
-              <a:defRPr sz="1000"/>
+            <a:lvl7pPr marL="1645920" indent="0">
+              <a:buNone/>
+              <a:defRPr sz="600"/>
             </a:lvl7pPr>
-            <a:lvl8pPr marL="3200400" indent="0">
-              <a:buNone/>
-              <a:defRPr sz="1000"/>
+            <a:lvl8pPr marL="1920240" indent="0">
+              <a:buNone/>
+              <a:defRPr sz="600"/>
             </a:lvl8pPr>
-            <a:lvl9pPr marL="3657600" indent="0">
-              <a:buNone/>
-              <a:defRPr sz="1000"/>
+            <a:lvl9pPr marL="2194560" indent="0">
+              <a:buNone/>
+              <a:defRPr sz="600"/>
             </a:lvl9pPr>
           </a:lstStyle>
           <a:p>
@@ -2642,13 +2335,7 @@
       </p:sp>
       <p:sp>
         <p:nvSpPr>
-          <p:cNvPr id="5" name="Date Placeholder 4">
-            <a:extLst>
-              <a:ext uri="{FF2B5EF4-FFF2-40B4-BE49-F238E27FC236}">
-                <a16:creationId xmlns:a16="http://schemas.microsoft.com/office/drawing/2014/main" id="{80586AF2-58CC-4B4B-DB52-7619FB32BE05}"/>
-              </a:ext>
-            </a:extLst>
-          </p:cNvPr>
+          <p:cNvPr id="5" name="Date Placeholder 4"/>
           <p:cNvSpPr>
             <a:spLocks noGrp="1"/>
           </p:cNvSpPr>
@@ -2671,13 +2358,7 @@
       </p:sp>
       <p:sp>
         <p:nvSpPr>
-          <p:cNvPr id="6" name="Footer Placeholder 5">
-            <a:extLst>
-              <a:ext uri="{FF2B5EF4-FFF2-40B4-BE49-F238E27FC236}">
-                <a16:creationId xmlns:a16="http://schemas.microsoft.com/office/drawing/2014/main" id="{36EBC291-7225-BFB7-5B1A-953AAEE2F85B}"/>
-              </a:ext>
-            </a:extLst>
-          </p:cNvPr>
+          <p:cNvPr id="6" name="Footer Placeholder 5"/>
           <p:cNvSpPr>
             <a:spLocks noGrp="1"/>
           </p:cNvSpPr>
@@ -2696,13 +2377,7 @@
       </p:sp>
       <p:sp>
         <p:nvSpPr>
-          <p:cNvPr id="7" name="Slide Number Placeholder 6">
-            <a:extLst>
-              <a:ext uri="{FF2B5EF4-FFF2-40B4-BE49-F238E27FC236}">
-                <a16:creationId xmlns:a16="http://schemas.microsoft.com/office/drawing/2014/main" id="{7BEB37DC-ADB3-5A5F-60CC-27E57A36CF2F}"/>
-              </a:ext>
-            </a:extLst>
-          </p:cNvPr>
+          <p:cNvPr id="7" name="Slide Number Placeholder 6"/>
           <p:cNvSpPr>
             <a:spLocks noGrp="1"/>
           </p:cNvSpPr>
@@ -2726,7 +2401,7 @@
     </p:spTree>
     <p:extLst>
       <p:ext uri="{BB962C8B-B14F-4D97-AF65-F5344CB8AC3E}">
-        <p14:creationId xmlns:p14="http://schemas.microsoft.com/office/powerpoint/2010/main" val="4289820857"/>
+        <p14:creationId xmlns:p14="http://schemas.microsoft.com/office/powerpoint/2010/main" val="2137225164"/>
       </p:ext>
     </p:extLst>
   </p:cSld>
@@ -2760,13 +2435,7 @@
       </p:grpSpPr>
       <p:sp>
         <p:nvSpPr>
-          <p:cNvPr id="2" name="Title Placeholder 1">
-            <a:extLst>
-              <a:ext uri="{FF2B5EF4-FFF2-40B4-BE49-F238E27FC236}">
-                <a16:creationId xmlns:a16="http://schemas.microsoft.com/office/drawing/2014/main" id="{4619D2BF-8445-4FCA-9424-F84D0A699F97}"/>
-              </a:ext>
-            </a:extLst>
-          </p:cNvPr>
+          <p:cNvPr id="2" name="Title Placeholder 1"/>
           <p:cNvSpPr>
             <a:spLocks noGrp="1"/>
           </p:cNvSpPr>
@@ -2776,8 +2445,8 @@
         </p:nvSpPr>
         <p:spPr>
           <a:xfrm>
-            <a:off x="838200" y="365125"/>
-            <a:ext cx="10515600" cy="1325563"/>
+            <a:off x="1131570" y="219075"/>
+            <a:ext cx="14196060" cy="795338"/>
           </a:xfrm>
           <a:prstGeom prst="rect">
             <a:avLst/>
@@ -2793,18 +2462,13 @@
               <a:rPr lang="en-US"/>
               <a:t>Click to edit Master title style</a:t>
             </a:r>
-          </a:p>
-        </p:txBody>
-      </p:sp>
-      <p:sp>
-        <p:nvSpPr>
-          <p:cNvPr id="3" name="Text Placeholder 2">
-            <a:extLst>
-              <a:ext uri="{FF2B5EF4-FFF2-40B4-BE49-F238E27FC236}">
-                <a16:creationId xmlns:a16="http://schemas.microsoft.com/office/drawing/2014/main" id="{1DB46841-5895-B57E-B159-81EAD407C3C0}"/>
-              </a:ext>
-            </a:extLst>
-          </p:cNvPr>
+            <a:endParaRPr lang="en-US" dirty="0"/>
+          </a:p>
+        </p:txBody>
+      </p:sp>
+      <p:sp>
+        <p:nvSpPr>
+          <p:cNvPr id="3" name="Text Placeholder 2"/>
           <p:cNvSpPr>
             <a:spLocks noGrp="1"/>
           </p:cNvSpPr>
@@ -2814,8 +2478,8 @@
         </p:nvSpPr>
         <p:spPr>
           <a:xfrm>
-            <a:off x="838200" y="1825625"/>
-            <a:ext cx="10515600" cy="4351338"/>
+            <a:off x="1131570" y="1095375"/>
+            <a:ext cx="14196060" cy="2610803"/>
           </a:xfrm>
           <a:prstGeom prst="rect">
             <a:avLst/>
@@ -2860,18 +2524,13 @@
               <a:rPr lang="en-US"/>
               <a:t>Fifth level</a:t>
             </a:r>
-          </a:p>
-        </p:txBody>
-      </p:sp>
-      <p:sp>
-        <p:nvSpPr>
-          <p:cNvPr id="4" name="Date Placeholder 3">
-            <a:extLst>
-              <a:ext uri="{FF2B5EF4-FFF2-40B4-BE49-F238E27FC236}">
-                <a16:creationId xmlns:a16="http://schemas.microsoft.com/office/drawing/2014/main" id="{3E373F6D-4197-4328-C987-EDDEEEEED983}"/>
-              </a:ext>
-            </a:extLst>
-          </p:cNvPr>
+            <a:endParaRPr lang="en-US" dirty="0"/>
+          </a:p>
+        </p:txBody>
+      </p:sp>
+      <p:sp>
+        <p:nvSpPr>
+          <p:cNvPr id="4" name="Date Placeholder 3"/>
           <p:cNvSpPr>
             <a:spLocks noGrp="1"/>
           </p:cNvSpPr>
@@ -2881,8 +2540,8 @@
         </p:nvSpPr>
         <p:spPr>
           <a:xfrm>
-            <a:off x="838200" y="6356350"/>
-            <a:ext cx="2743200" cy="365125"/>
+            <a:off x="1131570" y="3813810"/>
+            <a:ext cx="3703320" cy="219075"/>
           </a:xfrm>
           <a:prstGeom prst="rect">
             <a:avLst/>
@@ -2892,7 +2551,7 @@
           <a:bodyPr vert="horz" lIns="91440" tIns="45720" rIns="91440" bIns="45720" rtlCol="0" anchor="ctr"/>
           <a:lstStyle>
             <a:lvl1pPr algn="l">
-              <a:defRPr sz="1200">
+              <a:defRPr sz="720">
                 <a:solidFill>
                   <a:schemeClr val="tx1">
                     <a:tint val="82000"/>
@@ -2912,13 +2571,7 @@
       </p:sp>
       <p:sp>
         <p:nvSpPr>
-          <p:cNvPr id="5" name="Footer Placeholder 4">
-            <a:extLst>
-              <a:ext uri="{FF2B5EF4-FFF2-40B4-BE49-F238E27FC236}">
-                <a16:creationId xmlns:a16="http://schemas.microsoft.com/office/drawing/2014/main" id="{01A8DDC2-4F1F-7479-D522-E1B20C179F35}"/>
-              </a:ext>
-            </a:extLst>
-          </p:cNvPr>
+          <p:cNvPr id="5" name="Footer Placeholder 4"/>
           <p:cNvSpPr>
             <a:spLocks noGrp="1"/>
           </p:cNvSpPr>
@@ -2928,8 +2581,8 @@
         </p:nvSpPr>
         <p:spPr>
           <a:xfrm>
-            <a:off x="4038600" y="6356350"/>
-            <a:ext cx="4114800" cy="365125"/>
+            <a:off x="5452110" y="3813810"/>
+            <a:ext cx="5554980" cy="219075"/>
           </a:xfrm>
           <a:prstGeom prst="rect">
             <a:avLst/>
@@ -2939,7 +2592,7 @@
           <a:bodyPr vert="horz" lIns="91440" tIns="45720" rIns="91440" bIns="45720" rtlCol="0" anchor="ctr"/>
           <a:lstStyle>
             <a:lvl1pPr algn="ctr">
-              <a:defRPr sz="1200">
+              <a:defRPr sz="720">
                 <a:solidFill>
                   <a:schemeClr val="tx1">
                     <a:tint val="82000"/>
@@ -2955,13 +2608,7 @@
       </p:sp>
       <p:sp>
         <p:nvSpPr>
-          <p:cNvPr id="6" name="Slide Number Placeholder 5">
-            <a:extLst>
-              <a:ext uri="{FF2B5EF4-FFF2-40B4-BE49-F238E27FC236}">
-                <a16:creationId xmlns:a16="http://schemas.microsoft.com/office/drawing/2014/main" id="{3CAF91CA-BBAC-26C4-971A-FA8CE34AE46C}"/>
-              </a:ext>
-            </a:extLst>
-          </p:cNvPr>
+          <p:cNvPr id="6" name="Slide Number Placeholder 5"/>
           <p:cNvSpPr>
             <a:spLocks noGrp="1"/>
           </p:cNvSpPr>
@@ -2971,8 +2618,8 @@
         </p:nvSpPr>
         <p:spPr>
           <a:xfrm>
-            <a:off x="8610600" y="6356350"/>
-            <a:ext cx="2743200" cy="365125"/>
+            <a:off x="11624310" y="3813810"/>
+            <a:ext cx="3703320" cy="219075"/>
           </a:xfrm>
           <a:prstGeom prst="rect">
             <a:avLst/>
@@ -2982,7 +2629,7 @@
           <a:bodyPr vert="horz" lIns="91440" tIns="45720" rIns="91440" bIns="45720" rtlCol="0" anchor="ctr"/>
           <a:lstStyle>
             <a:lvl1pPr algn="r">
-              <a:defRPr sz="1200">
+              <a:defRPr sz="720">
                 <a:solidFill>
                   <a:schemeClr val="tx1">
                     <a:tint val="82000"/>
@@ -3003,27 +2650,27 @@
     </p:spTree>
     <p:extLst>
       <p:ext uri="{BB962C8B-B14F-4D97-AF65-F5344CB8AC3E}">
-        <p14:creationId xmlns:p14="http://schemas.microsoft.com/office/powerpoint/2010/main" val="1565670366"/>
+        <p14:creationId xmlns:p14="http://schemas.microsoft.com/office/powerpoint/2010/main" val="2414031849"/>
       </p:ext>
     </p:extLst>
   </p:cSld>
   <p:clrMap bg1="lt1" tx1="dk1" bg2="lt2" tx2="dk2" accent1="accent1" accent2="accent2" accent3="accent3" accent4="accent4" accent5="accent5" accent6="accent6" hlink="hlink" folHlink="folHlink"/>
   <p:sldLayoutIdLst>
-    <p:sldLayoutId id="2147483649" r:id="rId1"/>
-    <p:sldLayoutId id="2147483650" r:id="rId2"/>
-    <p:sldLayoutId id="2147483651" r:id="rId3"/>
-    <p:sldLayoutId id="2147483652" r:id="rId4"/>
-    <p:sldLayoutId id="2147483653" r:id="rId5"/>
-    <p:sldLayoutId id="2147483654" r:id="rId6"/>
-    <p:sldLayoutId id="2147483655" r:id="rId7"/>
-    <p:sldLayoutId id="2147483656" r:id="rId8"/>
-    <p:sldLayoutId id="2147483657" r:id="rId9"/>
-    <p:sldLayoutId id="2147483658" r:id="rId10"/>
-    <p:sldLayoutId id="2147483659" r:id="rId11"/>
+    <p:sldLayoutId id="2147483685" r:id="rId1"/>
+    <p:sldLayoutId id="2147483686" r:id="rId2"/>
+    <p:sldLayoutId id="2147483687" r:id="rId3"/>
+    <p:sldLayoutId id="2147483688" r:id="rId4"/>
+    <p:sldLayoutId id="2147483689" r:id="rId5"/>
+    <p:sldLayoutId id="2147483690" r:id="rId6"/>
+    <p:sldLayoutId id="2147483691" r:id="rId7"/>
+    <p:sldLayoutId id="2147483692" r:id="rId8"/>
+    <p:sldLayoutId id="2147483693" r:id="rId9"/>
+    <p:sldLayoutId id="2147483694" r:id="rId10"/>
+    <p:sldLayoutId id="2147483695" r:id="rId11"/>
   </p:sldLayoutIdLst>
   <p:txStyles>
     <p:titleStyle>
-      <a:lvl1pPr algn="l" defTabSz="914400" rtl="0" eaLnBrk="1" latinLnBrk="0" hangingPunct="1">
+      <a:lvl1pPr algn="l" defTabSz="548640" rtl="0" eaLnBrk="1" latinLnBrk="0" hangingPunct="1">
         <a:lnSpc>
           <a:spcPct val="90000"/>
         </a:lnSpc>
@@ -3031,7 +2678,7 @@
           <a:spcPct val="0"/>
         </a:spcBef>
         <a:buNone/>
-        <a:defRPr sz="4400" kern="1200">
+        <a:defRPr sz="2640" kern="1200">
           <a:solidFill>
             <a:schemeClr val="tx1"/>
           </a:solidFill>
@@ -3042,16 +2689,16 @@
       </a:lvl1pPr>
     </p:titleStyle>
     <p:bodyStyle>
-      <a:lvl1pPr marL="228600" indent="-228600" algn="l" defTabSz="914400" rtl="0" eaLnBrk="1" latinLnBrk="0" hangingPunct="1">
+      <a:lvl1pPr marL="137160" indent="-137160" algn="l" defTabSz="548640" rtl="0" eaLnBrk="1" latinLnBrk="0" hangingPunct="1">
         <a:lnSpc>
           <a:spcPct val="90000"/>
         </a:lnSpc>
         <a:spcBef>
-          <a:spcPts val="1000"/>
+          <a:spcPts val="600"/>
         </a:spcBef>
         <a:buFont typeface="Arial" panose="020B0604020202020204" pitchFamily="34" charset="0"/>
         <a:buChar char="•"/>
-        <a:defRPr sz="2800" kern="1200">
+        <a:defRPr sz="1680" kern="1200">
           <a:solidFill>
             <a:schemeClr val="tx1"/>
           </a:solidFill>
@@ -3060,16 +2707,16 @@
           <a:cs typeface="+mn-cs"/>
         </a:defRPr>
       </a:lvl1pPr>
-      <a:lvl2pPr marL="685800" indent="-228600" algn="l" defTabSz="914400" rtl="0" eaLnBrk="1" latinLnBrk="0" hangingPunct="1">
+      <a:lvl2pPr marL="411480" indent="-137160" algn="l" defTabSz="548640" rtl="0" eaLnBrk="1" latinLnBrk="0" hangingPunct="1">
         <a:lnSpc>
           <a:spcPct val="90000"/>
         </a:lnSpc>
         <a:spcBef>
-          <a:spcPts val="500"/>
+          <a:spcPts val="300"/>
         </a:spcBef>
         <a:buFont typeface="Arial" panose="020B0604020202020204" pitchFamily="34" charset="0"/>
         <a:buChar char="•"/>
-        <a:defRPr sz="2400" kern="1200">
+        <a:defRPr sz="1440" kern="1200">
           <a:solidFill>
             <a:schemeClr val="tx1"/>
           </a:solidFill>
@@ -3078,16 +2725,16 @@
           <a:cs typeface="+mn-cs"/>
         </a:defRPr>
       </a:lvl2pPr>
-      <a:lvl3pPr marL="1143000" indent="-228600" algn="l" defTabSz="914400" rtl="0" eaLnBrk="1" latinLnBrk="0" hangingPunct="1">
+      <a:lvl3pPr marL="685800" indent="-137160" algn="l" defTabSz="548640" rtl="0" eaLnBrk="1" latinLnBrk="0" hangingPunct="1">
         <a:lnSpc>
           <a:spcPct val="90000"/>
         </a:lnSpc>
         <a:spcBef>
-          <a:spcPts val="500"/>
+          <a:spcPts val="300"/>
         </a:spcBef>
         <a:buFont typeface="Arial" panose="020B0604020202020204" pitchFamily="34" charset="0"/>
         <a:buChar char="•"/>
-        <a:defRPr sz="2000" kern="1200">
+        <a:defRPr sz="1200" kern="1200">
           <a:solidFill>
             <a:schemeClr val="tx1"/>
           </a:solidFill>
@@ -3096,16 +2743,16 @@
           <a:cs typeface="+mn-cs"/>
         </a:defRPr>
       </a:lvl3pPr>
-      <a:lvl4pPr marL="1600200" indent="-228600" algn="l" defTabSz="914400" rtl="0" eaLnBrk="1" latinLnBrk="0" hangingPunct="1">
+      <a:lvl4pPr marL="960120" indent="-137160" algn="l" defTabSz="548640" rtl="0" eaLnBrk="1" latinLnBrk="0" hangingPunct="1">
         <a:lnSpc>
           <a:spcPct val="90000"/>
         </a:lnSpc>
         <a:spcBef>
-          <a:spcPts val="500"/>
+          <a:spcPts val="300"/>
         </a:spcBef>
         <a:buFont typeface="Arial" panose="020B0604020202020204" pitchFamily="34" charset="0"/>
         <a:buChar char="•"/>
-        <a:defRPr sz="1800" kern="1200">
+        <a:defRPr sz="1080" kern="1200">
           <a:solidFill>
             <a:schemeClr val="tx1"/>
           </a:solidFill>
@@ -3114,16 +2761,16 @@
           <a:cs typeface="+mn-cs"/>
         </a:defRPr>
       </a:lvl4pPr>
-      <a:lvl5pPr marL="2057400" indent="-228600" algn="l" defTabSz="914400" rtl="0" eaLnBrk="1" latinLnBrk="0" hangingPunct="1">
+      <a:lvl5pPr marL="1234440" indent="-137160" algn="l" defTabSz="548640" rtl="0" eaLnBrk="1" latinLnBrk="0" hangingPunct="1">
         <a:lnSpc>
           <a:spcPct val="90000"/>
         </a:lnSpc>
         <a:spcBef>
-          <a:spcPts val="500"/>
+          <a:spcPts val="300"/>
         </a:spcBef>
         <a:buFont typeface="Arial" panose="020B0604020202020204" pitchFamily="34" charset="0"/>
         <a:buChar char="•"/>
-        <a:defRPr sz="1800" kern="1200">
+        <a:defRPr sz="1080" kern="1200">
           <a:solidFill>
             <a:schemeClr val="tx1"/>
           </a:solidFill>
@@ -3132,16 +2779,16 @@
           <a:cs typeface="+mn-cs"/>
         </a:defRPr>
       </a:lvl5pPr>
-      <a:lvl6pPr marL="2514600" indent="-228600" algn="l" defTabSz="914400" rtl="0" eaLnBrk="1" latinLnBrk="0" hangingPunct="1">
+      <a:lvl6pPr marL="1508760" indent="-137160" algn="l" defTabSz="548640" rtl="0" eaLnBrk="1" latinLnBrk="0" hangingPunct="1">
         <a:lnSpc>
           <a:spcPct val="90000"/>
         </a:lnSpc>
         <a:spcBef>
-          <a:spcPts val="500"/>
+          <a:spcPts val="300"/>
         </a:spcBef>
         <a:buFont typeface="Arial" panose="020B0604020202020204" pitchFamily="34" charset="0"/>
         <a:buChar char="•"/>
-        <a:defRPr sz="1800" kern="1200">
+        <a:defRPr sz="1080" kern="1200">
           <a:solidFill>
             <a:schemeClr val="tx1"/>
           </a:solidFill>
@@ -3150,16 +2797,16 @@
           <a:cs typeface="+mn-cs"/>
         </a:defRPr>
       </a:lvl6pPr>
-      <a:lvl7pPr marL="2971800" indent="-228600" algn="l" defTabSz="914400" rtl="0" eaLnBrk="1" latinLnBrk="0" hangingPunct="1">
+      <a:lvl7pPr marL="1783080" indent="-137160" algn="l" defTabSz="548640" rtl="0" eaLnBrk="1" latinLnBrk="0" hangingPunct="1">
         <a:lnSpc>
           <a:spcPct val="90000"/>
         </a:lnSpc>
         <a:spcBef>
-          <a:spcPts val="500"/>
+          <a:spcPts val="300"/>
         </a:spcBef>
         <a:buFont typeface="Arial" panose="020B0604020202020204" pitchFamily="34" charset="0"/>
         <a:buChar char="•"/>
-        <a:defRPr sz="1800" kern="1200">
+        <a:defRPr sz="1080" kern="1200">
           <a:solidFill>
             <a:schemeClr val="tx1"/>
           </a:solidFill>
@@ -3168,16 +2815,16 @@
           <a:cs typeface="+mn-cs"/>
         </a:defRPr>
       </a:lvl7pPr>
-      <a:lvl8pPr marL="3429000" indent="-228600" algn="l" defTabSz="914400" rtl="0" eaLnBrk="1" latinLnBrk="0" hangingPunct="1">
+      <a:lvl8pPr marL="2057400" indent="-137160" algn="l" defTabSz="548640" rtl="0" eaLnBrk="1" latinLnBrk="0" hangingPunct="1">
         <a:lnSpc>
           <a:spcPct val="90000"/>
         </a:lnSpc>
         <a:spcBef>
-          <a:spcPts val="500"/>
+          <a:spcPts val="300"/>
         </a:spcBef>
         <a:buFont typeface="Arial" panose="020B0604020202020204" pitchFamily="34" charset="0"/>
         <a:buChar char="•"/>
-        <a:defRPr sz="1800" kern="1200">
+        <a:defRPr sz="1080" kern="1200">
           <a:solidFill>
             <a:schemeClr val="tx1"/>
           </a:solidFill>
@@ -3186,16 +2833,16 @@
           <a:cs typeface="+mn-cs"/>
         </a:defRPr>
       </a:lvl8pPr>
-      <a:lvl9pPr marL="3886200" indent="-228600" algn="l" defTabSz="914400" rtl="0" eaLnBrk="1" latinLnBrk="0" hangingPunct="1">
+      <a:lvl9pPr marL="2331720" indent="-137160" algn="l" defTabSz="548640" rtl="0" eaLnBrk="1" latinLnBrk="0" hangingPunct="1">
         <a:lnSpc>
           <a:spcPct val="90000"/>
         </a:lnSpc>
         <a:spcBef>
-          <a:spcPts val="500"/>
+          <a:spcPts val="300"/>
         </a:spcBef>
         <a:buFont typeface="Arial" panose="020B0604020202020204" pitchFamily="34" charset="0"/>
         <a:buChar char="•"/>
-        <a:defRPr sz="1800" kern="1200">
+        <a:defRPr sz="1080" kern="1200">
           <a:solidFill>
             <a:schemeClr val="tx1"/>
           </a:solidFill>
@@ -3209,8 +2856,8 @@
       <a:defPPr>
         <a:defRPr lang="en-US"/>
       </a:defPPr>
-      <a:lvl1pPr marL="0" algn="l" defTabSz="914400" rtl="0" eaLnBrk="1" latinLnBrk="0" hangingPunct="1">
-        <a:defRPr sz="1800" kern="1200">
+      <a:lvl1pPr marL="0" algn="l" defTabSz="548640" rtl="0" eaLnBrk="1" latinLnBrk="0" hangingPunct="1">
+        <a:defRPr sz="1080" kern="1200">
           <a:solidFill>
             <a:schemeClr val="tx1"/>
           </a:solidFill>
@@ -3219,8 +2866,8 @@
           <a:cs typeface="+mn-cs"/>
         </a:defRPr>
       </a:lvl1pPr>
-      <a:lvl2pPr marL="457200" algn="l" defTabSz="914400" rtl="0" eaLnBrk="1" latinLnBrk="0" hangingPunct="1">
-        <a:defRPr sz="1800" kern="1200">
+      <a:lvl2pPr marL="274320" algn="l" defTabSz="548640" rtl="0" eaLnBrk="1" latinLnBrk="0" hangingPunct="1">
+        <a:defRPr sz="1080" kern="1200">
           <a:solidFill>
             <a:schemeClr val="tx1"/>
           </a:solidFill>
@@ -3229,8 +2876,8 @@
           <a:cs typeface="+mn-cs"/>
         </a:defRPr>
       </a:lvl2pPr>
-      <a:lvl3pPr marL="914400" algn="l" defTabSz="914400" rtl="0" eaLnBrk="1" latinLnBrk="0" hangingPunct="1">
-        <a:defRPr sz="1800" kern="1200">
+      <a:lvl3pPr marL="548640" algn="l" defTabSz="548640" rtl="0" eaLnBrk="1" latinLnBrk="0" hangingPunct="1">
+        <a:defRPr sz="1080" kern="1200">
           <a:solidFill>
             <a:schemeClr val="tx1"/>
           </a:solidFill>
@@ -3239,8 +2886,8 @@
           <a:cs typeface="+mn-cs"/>
         </a:defRPr>
       </a:lvl3pPr>
-      <a:lvl4pPr marL="1371600" algn="l" defTabSz="914400" rtl="0" eaLnBrk="1" latinLnBrk="0" hangingPunct="1">
-        <a:defRPr sz="1800" kern="1200">
+      <a:lvl4pPr marL="822960" algn="l" defTabSz="548640" rtl="0" eaLnBrk="1" latinLnBrk="0" hangingPunct="1">
+        <a:defRPr sz="1080" kern="1200">
           <a:solidFill>
             <a:schemeClr val="tx1"/>
           </a:solidFill>
@@ -3249,8 +2896,8 @@
           <a:cs typeface="+mn-cs"/>
         </a:defRPr>
       </a:lvl4pPr>
-      <a:lvl5pPr marL="1828800" algn="l" defTabSz="914400" rtl="0" eaLnBrk="1" latinLnBrk="0" hangingPunct="1">
-        <a:defRPr sz="1800" kern="1200">
+      <a:lvl5pPr marL="1097280" algn="l" defTabSz="548640" rtl="0" eaLnBrk="1" latinLnBrk="0" hangingPunct="1">
+        <a:defRPr sz="1080" kern="1200">
           <a:solidFill>
             <a:schemeClr val="tx1"/>
           </a:solidFill>
@@ -3259,8 +2906,8 @@
           <a:cs typeface="+mn-cs"/>
         </a:defRPr>
       </a:lvl5pPr>
-      <a:lvl6pPr marL="2286000" algn="l" defTabSz="914400" rtl="0" eaLnBrk="1" latinLnBrk="0" hangingPunct="1">
-        <a:defRPr sz="1800" kern="1200">
+      <a:lvl6pPr marL="1371600" algn="l" defTabSz="548640" rtl="0" eaLnBrk="1" latinLnBrk="0" hangingPunct="1">
+        <a:defRPr sz="1080" kern="1200">
           <a:solidFill>
             <a:schemeClr val="tx1"/>
           </a:solidFill>
@@ -3269,8 +2916,8 @@
           <a:cs typeface="+mn-cs"/>
         </a:defRPr>
       </a:lvl6pPr>
-      <a:lvl7pPr marL="2743200" algn="l" defTabSz="914400" rtl="0" eaLnBrk="1" latinLnBrk="0" hangingPunct="1">
-        <a:defRPr sz="1800" kern="1200">
+      <a:lvl7pPr marL="1645920" algn="l" defTabSz="548640" rtl="0" eaLnBrk="1" latinLnBrk="0" hangingPunct="1">
+        <a:defRPr sz="1080" kern="1200">
           <a:solidFill>
             <a:schemeClr val="tx1"/>
           </a:solidFill>
@@ -3279,8 +2926,8 @@
           <a:cs typeface="+mn-cs"/>
         </a:defRPr>
       </a:lvl7pPr>
-      <a:lvl8pPr marL="3200400" algn="l" defTabSz="914400" rtl="0" eaLnBrk="1" latinLnBrk="0" hangingPunct="1">
-        <a:defRPr sz="1800" kern="1200">
+      <a:lvl8pPr marL="1920240" algn="l" defTabSz="548640" rtl="0" eaLnBrk="1" latinLnBrk="0" hangingPunct="1">
+        <a:defRPr sz="1080" kern="1200">
           <a:solidFill>
             <a:schemeClr val="tx1"/>
           </a:solidFill>
@@ -3289,8 +2936,8 @@
           <a:cs typeface="+mn-cs"/>
         </a:defRPr>
       </a:lvl8pPr>
-      <a:lvl9pPr marL="3657600" algn="l" defTabSz="914400" rtl="0" eaLnBrk="1" latinLnBrk="0" hangingPunct="1">
-        <a:defRPr sz="1800" kern="1200">
+      <a:lvl9pPr marL="2194560" algn="l" defTabSz="548640" rtl="0" eaLnBrk="1" latinLnBrk="0" hangingPunct="1">
+        <a:defRPr sz="1080" kern="1200">
           <a:solidFill>
             <a:schemeClr val="tx1"/>
           </a:solidFill>
@@ -3335,8 +2982,8 @@
         </p:nvSpPr>
         <p:spPr>
           <a:xfrm>
-            <a:off x="255231" y="1896691"/>
-            <a:ext cx="2204189" cy="741406"/>
+            <a:off x="443888" y="1279417"/>
+            <a:ext cx="2975656" cy="1000898"/>
           </a:xfrm>
           <a:prstGeom prst="roundRect">
             <a:avLst/>
@@ -3362,7 +3009,7 @@
           <a:p>
             <a:pPr algn="ctr"/>
             <a:r>
-              <a:rPr lang="en-US" sz="2400" dirty="0"/>
+              <a:rPr lang="en-US" sz="3240" dirty="0"/>
               <a:t>[1,2,3] ++ [4,5]</a:t>
             </a:r>
           </a:p>
@@ -3382,8 +3029,8 @@
         </p:nvSpPr>
         <p:spPr>
           <a:xfrm>
-            <a:off x="2825012" y="520048"/>
-            <a:ext cx="2356589" cy="741406"/>
+            <a:off x="3813768" y="49389"/>
+            <a:ext cx="3181396" cy="1000898"/>
           </a:xfrm>
           <a:prstGeom prst="roundRect">
             <a:avLst/>
@@ -3409,7 +3056,7 @@
           <a:p>
             <a:pPr algn="ctr"/>
             <a:r>
-              <a:rPr lang="en-US" sz="2400" dirty="0"/>
+              <a:rPr lang="en-US" sz="3240" dirty="0"/>
               <a:t>1 : ⊥</a:t>
             </a:r>
           </a:p>
@@ -3429,8 +3076,8 @@
         </p:nvSpPr>
         <p:spPr>
           <a:xfrm>
-            <a:off x="2825011" y="3194932"/>
-            <a:ext cx="2356589" cy="741406"/>
+            <a:off x="3813768" y="2370797"/>
+            <a:ext cx="3181396" cy="1000898"/>
           </a:xfrm>
           <a:prstGeom prst="roundRect">
             <a:avLst/>
@@ -3456,7 +3103,7 @@
           <a:p>
             <a:pPr algn="ctr"/>
             <a:r>
-              <a:rPr lang="en-US" sz="2400" dirty="0"/>
+              <a:rPr lang="en-US" sz="3240" dirty="0"/>
               <a:t>1 : ([2,3]++[4,5])</a:t>
             </a:r>
           </a:p>
@@ -3476,8 +3123,8 @@
         </p:nvSpPr>
         <p:spPr>
           <a:xfrm>
-            <a:off x="5391808" y="2085877"/>
-            <a:ext cx="2645623" cy="741406"/>
+            <a:off x="7971077" y="32113"/>
+            <a:ext cx="3571591" cy="1000898"/>
           </a:xfrm>
           <a:prstGeom prst="roundRect">
             <a:avLst/>
@@ -3503,7 +3150,7 @@
           <a:p>
             <a:pPr algn="ctr"/>
             <a:r>
-              <a:rPr lang="en-US" sz="2400" dirty="0"/>
+              <a:rPr lang="en-US" sz="3240" dirty="0"/>
               <a:t>1 : 2 : ⊥</a:t>
             </a:r>
           </a:p>
@@ -3523,8 +3170,8 @@
         </p:nvSpPr>
         <p:spPr>
           <a:xfrm>
-            <a:off x="5391808" y="4241138"/>
-            <a:ext cx="2645624" cy="741406"/>
+            <a:off x="7861646" y="2370797"/>
+            <a:ext cx="3571592" cy="1000898"/>
           </a:xfrm>
           <a:prstGeom prst="roundRect">
             <a:avLst/>
@@ -3550,7 +3197,7 @@
           <a:p>
             <a:pPr algn="ctr"/>
             <a:r>
-              <a:rPr lang="en-US" sz="2400" dirty="0"/>
+              <a:rPr lang="en-US" sz="3240" dirty="0"/>
               <a:t>1 : 2 : ([3] ++ [4,5])</a:t>
             </a:r>
           </a:p>
@@ -3570,8 +3217,8 @@
         </p:nvSpPr>
         <p:spPr>
           <a:xfrm>
-            <a:off x="8390238" y="3194932"/>
-            <a:ext cx="2908382" cy="741406"/>
+            <a:off x="12224595" y="3960"/>
+            <a:ext cx="3926316" cy="1000898"/>
           </a:xfrm>
           <a:prstGeom prst="roundRect">
             <a:avLst/>
@@ -3597,7 +3244,7 @@
           <a:p>
             <a:pPr algn="ctr"/>
             <a:r>
-              <a:rPr lang="en-US" sz="2400" dirty="0"/>
+              <a:rPr lang="en-US" sz="3240" dirty="0"/>
               <a:t>1 : 2 : 3 : ⊥</a:t>
             </a:r>
           </a:p>
@@ -3617,8 +3264,8 @@
         </p:nvSpPr>
         <p:spPr>
           <a:xfrm>
-            <a:off x="8390237" y="5233725"/>
-            <a:ext cx="2908383" cy="741406"/>
+            <a:off x="12224598" y="2370797"/>
+            <a:ext cx="3926317" cy="1000898"/>
           </a:xfrm>
           <a:prstGeom prst="roundRect">
             <a:avLst/>
@@ -3644,7 +3291,7 @@
           <a:p>
             <a:pPr algn="ctr"/>
             <a:r>
-              <a:rPr lang="en-US" sz="2400" dirty="0"/>
+              <a:rPr lang="en-US" sz="3240" dirty="0"/>
               <a:t>1 : 2 : 3 : ([] ++ [4,5])</a:t>
             </a:r>
           </a:p>
@@ -3667,8 +3314,8 @@
         </p:nvCxnSpPr>
         <p:spPr>
           <a:xfrm flipV="1">
-            <a:off x="2459420" y="890751"/>
-            <a:ext cx="365592" cy="1376643"/>
+            <a:off x="3419543" y="549841"/>
+            <a:ext cx="394226" cy="1230027"/>
           </a:xfrm>
           <a:prstGeom prst="straightConnector1">
             <a:avLst/>
@@ -3716,8 +3363,8 @@
         </p:nvCxnSpPr>
         <p:spPr>
           <a:xfrm>
-            <a:off x="2459420" y="2267394"/>
-            <a:ext cx="365591" cy="1298241"/>
+            <a:off x="3419543" y="1779866"/>
+            <a:ext cx="394226" cy="1091380"/>
           </a:xfrm>
           <a:prstGeom prst="straightConnector1">
             <a:avLst/>
@@ -3758,14 +3405,15 @@
           </p:cNvPr>
           <p:cNvCxnSpPr>
             <a:cxnSpLocks/>
+            <a:stCxn id="8" idx="3"/>
             <a:endCxn id="10" idx="1"/>
           </p:cNvCxnSpPr>
           <p:nvPr/>
         </p:nvCxnSpPr>
         <p:spPr>
           <a:xfrm>
-            <a:off x="5181600" y="3565635"/>
-            <a:ext cx="210208" cy="1046206"/>
+            <a:off x="6995163" y="2871246"/>
+            <a:ext cx="866486" cy="0"/>
           </a:xfrm>
           <a:prstGeom prst="straightConnector1">
             <a:avLst/>
@@ -3806,15 +3454,14 @@
           </p:cNvPr>
           <p:cNvCxnSpPr>
             <a:cxnSpLocks/>
-            <a:stCxn id="8" idx="3"/>
             <a:endCxn id="9" idx="1"/>
           </p:cNvCxnSpPr>
           <p:nvPr/>
         </p:nvCxnSpPr>
         <p:spPr>
           <a:xfrm flipV="1">
-            <a:off x="5181600" y="2456580"/>
-            <a:ext cx="210208" cy="1109055"/>
+            <a:off x="6995161" y="532563"/>
+            <a:ext cx="975914" cy="2272152"/>
           </a:xfrm>
           <a:prstGeom prst="straightConnector1">
             <a:avLst/>
@@ -3855,14 +3502,15 @@
           </p:cNvPr>
           <p:cNvCxnSpPr>
             <a:cxnSpLocks/>
+            <a:stCxn id="10" idx="3"/>
             <a:endCxn id="12" idx="1"/>
           </p:cNvCxnSpPr>
           <p:nvPr/>
         </p:nvCxnSpPr>
         <p:spPr>
           <a:xfrm>
-            <a:off x="8037431" y="4710622"/>
-            <a:ext cx="352806" cy="893806"/>
+            <a:off x="11433241" y="2871246"/>
+            <a:ext cx="791357" cy="0"/>
           </a:xfrm>
           <a:prstGeom prst="straightConnector1">
             <a:avLst/>
@@ -3903,14 +3551,15 @@
           </p:cNvPr>
           <p:cNvCxnSpPr>
             <a:cxnSpLocks/>
+            <a:stCxn id="10" idx="3"/>
             <a:endCxn id="11" idx="1"/>
           </p:cNvCxnSpPr>
           <p:nvPr/>
         </p:nvCxnSpPr>
         <p:spPr>
           <a:xfrm flipV="1">
-            <a:off x="8037430" y="3565635"/>
-            <a:ext cx="352808" cy="1144987"/>
+            <a:off x="11433241" y="504409"/>
+            <a:ext cx="791357" cy="2366836"/>
           </a:xfrm>
           <a:prstGeom prst="straightConnector1">
             <a:avLst/>
@@ -3954,8 +3603,8 @@
         </p:nvSpPr>
         <p:spPr>
           <a:xfrm>
-            <a:off x="1588552" y="1162889"/>
-            <a:ext cx="944441" cy="461665"/>
+            <a:off x="2144548" y="459359"/>
+            <a:ext cx="1274996" cy="590931"/>
           </a:xfrm>
           <a:prstGeom prst="rect">
             <a:avLst/>
@@ -3969,7 +3618,7 @@
           <a:lstStyle/>
           <a:p>
             <a:r>
-              <a:rPr lang="en-US" sz="2400" dirty="0"/>
+              <a:rPr lang="en-US" sz="3240" dirty="0"/>
               <a:t>Skip</a:t>
             </a:r>
           </a:p>
@@ -3989,8 +3638,8 @@
         </p:nvSpPr>
         <p:spPr>
           <a:xfrm>
-            <a:off x="1198180" y="2904056"/>
-            <a:ext cx="1334813" cy="461665"/>
+            <a:off x="1740234" y="2575781"/>
+            <a:ext cx="1801998" cy="590931"/>
           </a:xfrm>
           <a:prstGeom prst="rect">
             <a:avLst/>
@@ -4004,7 +3653,7 @@
           <a:lstStyle/>
           <a:p>
             <a:r>
-              <a:rPr lang="en-US" sz="2400" dirty="0"/>
+              <a:rPr lang="en-US" sz="3240" dirty="0"/>
               <a:t>Evaluate</a:t>
             </a:r>
           </a:p>
@@ -4024,8 +3673,8 @@
         </p:nvSpPr>
         <p:spPr>
           <a:xfrm>
-            <a:off x="4342263" y="2593396"/>
-            <a:ext cx="944441" cy="461665"/>
+            <a:off x="6238591" y="1188937"/>
+            <a:ext cx="1274996" cy="590931"/>
           </a:xfrm>
           <a:prstGeom prst="rect">
             <a:avLst/>
@@ -4039,7 +3688,7 @@
           <a:lstStyle/>
           <a:p>
             <a:r>
-              <a:rPr lang="en-US" sz="2400" dirty="0"/>
+              <a:rPr lang="en-US" sz="3240" dirty="0"/>
               <a:t>Skip</a:t>
             </a:r>
           </a:p>
@@ -4059,8 +3708,8 @@
         </p:nvSpPr>
         <p:spPr>
           <a:xfrm>
-            <a:off x="3794235" y="4054771"/>
-            <a:ext cx="1334813" cy="461665"/>
+            <a:off x="6612587" y="3371697"/>
+            <a:ext cx="1801998" cy="590931"/>
           </a:xfrm>
           <a:prstGeom prst="rect">
             <a:avLst/>
@@ -4074,7 +3723,7 @@
           <a:lstStyle/>
           <a:p>
             <a:r>
-              <a:rPr lang="en-US" sz="2400" dirty="0"/>
+              <a:rPr lang="en-US" sz="3240" dirty="0"/>
               <a:t>Evaluate</a:t>
             </a:r>
           </a:p>
@@ -4094,8 +3743,8 @@
         </p:nvSpPr>
         <p:spPr>
           <a:xfrm>
-            <a:off x="7269393" y="3594121"/>
-            <a:ext cx="944441" cy="461665"/>
+            <a:off x="10689323" y="1262398"/>
+            <a:ext cx="1274996" cy="590931"/>
           </a:xfrm>
           <a:prstGeom prst="rect">
             <a:avLst/>
@@ -4109,7 +3758,7 @@
           <a:lstStyle/>
           <a:p>
             <a:r>
-              <a:rPr lang="en-US" sz="2400" dirty="0"/>
+              <a:rPr lang="en-US" sz="3240" dirty="0"/>
               <a:t>Skip</a:t>
             </a:r>
           </a:p>
@@ -4129,8 +3778,8 @@
         </p:nvSpPr>
         <p:spPr>
           <a:xfrm>
-            <a:off x="6879021" y="5180106"/>
-            <a:ext cx="1334813" cy="461665"/>
+            <a:off x="11063318" y="3326456"/>
+            <a:ext cx="1801998" cy="590931"/>
           </a:xfrm>
           <a:prstGeom prst="rect">
             <a:avLst/>
@@ -4144,7 +3793,7 @@
           <a:lstStyle/>
           <a:p>
             <a:r>
-              <a:rPr lang="en-US" sz="2400" dirty="0"/>
+              <a:rPr lang="en-US" sz="3240" dirty="0"/>
               <a:t>Evaluate</a:t>
             </a:r>
           </a:p>
@@ -4166,7 +3815,7 @@
 <file path=ppt/theme/theme1.xml><?xml version="1.0" encoding="utf-8"?>
 <a:theme xmlns:a="http://schemas.openxmlformats.org/drawingml/2006/main" name="Office Theme">
   <a:themeElements>
-    <a:clrScheme name="Office">
+    <a:clrScheme name="Office Theme">
       <a:dk1>
         <a:sysClr val="windowText" lastClr="000000"/>
       </a:dk1>
@@ -4204,7 +3853,7 @@
         <a:srgbClr val="96607D"/>
       </a:folHlink>
     </a:clrScheme>
-    <a:fontScheme name="Office">
+    <a:fontScheme name="Office Theme">
       <a:majorFont>
         <a:latin typeface="Aptos Display" panose="02110004020202020204"/>
         <a:ea typeface=""/>
@@ -4310,7 +3959,7 @@
         <a:font script="Tfng" typeface="Ebrima"/>
       </a:minorFont>
     </a:fontScheme>
-    <a:fmtScheme name="Office">
+    <a:fmtScheme name="Office Theme">
       <a:fillStyleLst>
         <a:solidFill>
           <a:schemeClr val="phClr"/>

--- a/paper/Figs/forking-paths.pptx
+++ b/paper/Figs/forking-paths.pptx
@@ -2,12 +2,12 @@
 <file path=ppt/presentation.xml><?xml version="1.0" encoding="utf-8"?>
 <p:presentation xmlns:a="http://schemas.openxmlformats.org/drawingml/2006/main" xmlns:r="http://schemas.openxmlformats.org/officeDocument/2006/relationships" xmlns:p="http://schemas.openxmlformats.org/presentationml/2006/main" saveSubsetFonts="1" autoCompressPictures="0">
   <p:sldMasterIdLst>
-    <p:sldMasterId id="2147483684" r:id="rId1"/>
+    <p:sldMasterId id="2147483696" r:id="rId1"/>
   </p:sldMasterIdLst>
   <p:sldIdLst>
     <p:sldId id="256" r:id="rId2"/>
   </p:sldIdLst>
-  <p:sldSz cx="16459200" cy="4114800"/>
+  <p:sldSz cx="20116800" cy="4114800"/>
   <p:notesSz cx="6858000" cy="9144000"/>
   <p:defaultTextStyle>
     <a:defPPr>
@@ -136,8 +136,8 @@
         </p:nvSpPr>
         <p:spPr>
           <a:xfrm>
-            <a:off x="2057400" y="673418"/>
-            <a:ext cx="12344400" cy="1432560"/>
+            <a:off x="2514600" y="673418"/>
+            <a:ext cx="15087600" cy="1432560"/>
           </a:xfrm>
         </p:spPr>
         <p:txBody>
@@ -168,8 +168,8 @@
         </p:nvSpPr>
         <p:spPr>
           <a:xfrm>
-            <a:off x="2057400" y="2161223"/>
-            <a:ext cx="12344400" cy="993457"/>
+            <a:off x="2514600" y="2161223"/>
+            <a:ext cx="15087600" cy="993457"/>
           </a:xfrm>
         </p:spPr>
         <p:txBody>
@@ -289,7 +289,7 @@
     </p:spTree>
     <p:extLst>
       <p:ext uri="{BB962C8B-B14F-4D97-AF65-F5344CB8AC3E}">
-        <p14:creationId xmlns:p14="http://schemas.microsoft.com/office/powerpoint/2010/main" val="920275353"/>
+        <p14:creationId xmlns:p14="http://schemas.microsoft.com/office/powerpoint/2010/main" val="3991234201"/>
       </p:ext>
     </p:extLst>
   </p:cSld>
@@ -459,7 +459,7 @@
     </p:spTree>
     <p:extLst>
       <p:ext uri="{BB962C8B-B14F-4D97-AF65-F5344CB8AC3E}">
-        <p14:creationId xmlns:p14="http://schemas.microsoft.com/office/powerpoint/2010/main" val="2663716409"/>
+        <p14:creationId xmlns:p14="http://schemas.microsoft.com/office/powerpoint/2010/main" val="2578936455"/>
       </p:ext>
     </p:extLst>
   </p:cSld>
@@ -498,8 +498,8 @@
         </p:nvSpPr>
         <p:spPr>
           <a:xfrm>
-            <a:off x="11778615" y="219075"/>
-            <a:ext cx="3549015" cy="3487103"/>
+            <a:off x="14396085" y="219075"/>
+            <a:ext cx="4337685" cy="3487103"/>
           </a:xfrm>
         </p:spPr>
         <p:txBody>
@@ -526,8 +526,8 @@
         </p:nvSpPr>
         <p:spPr>
           <a:xfrm>
-            <a:off x="1131570" y="219075"/>
-            <a:ext cx="10441305" cy="3487103"/>
+            <a:off x="1383030" y="219075"/>
+            <a:ext cx="12761595" cy="3487103"/>
           </a:xfrm>
         </p:spPr>
         <p:txBody>
@@ -639,7 +639,7 @@
     </p:spTree>
     <p:extLst>
       <p:ext uri="{BB962C8B-B14F-4D97-AF65-F5344CB8AC3E}">
-        <p14:creationId xmlns:p14="http://schemas.microsoft.com/office/powerpoint/2010/main" val="1291786144"/>
+        <p14:creationId xmlns:p14="http://schemas.microsoft.com/office/powerpoint/2010/main" val="5575216"/>
       </p:ext>
     </p:extLst>
   </p:cSld>
@@ -809,7 +809,7 @@
     </p:spTree>
     <p:extLst>
       <p:ext uri="{BB962C8B-B14F-4D97-AF65-F5344CB8AC3E}">
-        <p14:creationId xmlns:p14="http://schemas.microsoft.com/office/powerpoint/2010/main" val="4098815108"/>
+        <p14:creationId xmlns:p14="http://schemas.microsoft.com/office/powerpoint/2010/main" val="3331800984"/>
       </p:ext>
     </p:extLst>
   </p:cSld>
@@ -848,8 +848,8 @@
         </p:nvSpPr>
         <p:spPr>
           <a:xfrm>
-            <a:off x="1122997" y="1025843"/>
-            <a:ext cx="14196060" cy="1711642"/>
+            <a:off x="1372552" y="1025843"/>
+            <a:ext cx="17350740" cy="1711642"/>
           </a:xfrm>
         </p:spPr>
         <p:txBody>
@@ -880,8 +880,8 @@
         </p:nvSpPr>
         <p:spPr>
           <a:xfrm>
-            <a:off x="1122997" y="2753678"/>
-            <a:ext cx="14196060" cy="900112"/>
+            <a:off x="1372552" y="2753678"/>
+            <a:ext cx="17350740" cy="900112"/>
           </a:xfrm>
         </p:spPr>
         <p:txBody>
@@ -1055,7 +1055,7 @@
     </p:spTree>
     <p:extLst>
       <p:ext uri="{BB962C8B-B14F-4D97-AF65-F5344CB8AC3E}">
-        <p14:creationId xmlns:p14="http://schemas.microsoft.com/office/powerpoint/2010/main" val="3453874180"/>
+        <p14:creationId xmlns:p14="http://schemas.microsoft.com/office/powerpoint/2010/main" val="112539414"/>
       </p:ext>
     </p:extLst>
   </p:cSld>
@@ -1117,8 +1117,8 @@
         </p:nvSpPr>
         <p:spPr>
           <a:xfrm>
-            <a:off x="1131570" y="1095375"/>
-            <a:ext cx="6995160" cy="2610803"/>
+            <a:off x="1383030" y="1095375"/>
+            <a:ext cx="8549640" cy="2610803"/>
           </a:xfrm>
         </p:spPr>
         <p:txBody>
@@ -1174,8 +1174,8 @@
         </p:nvSpPr>
         <p:spPr>
           <a:xfrm>
-            <a:off x="8332470" y="1095375"/>
-            <a:ext cx="6995160" cy="2610803"/>
+            <a:off x="10184130" y="1095375"/>
+            <a:ext cx="8549640" cy="2610803"/>
           </a:xfrm>
         </p:spPr>
         <p:txBody>
@@ -1287,7 +1287,7 @@
     </p:spTree>
     <p:extLst>
       <p:ext uri="{BB962C8B-B14F-4D97-AF65-F5344CB8AC3E}">
-        <p14:creationId xmlns:p14="http://schemas.microsoft.com/office/powerpoint/2010/main" val="495077577"/>
+        <p14:creationId xmlns:p14="http://schemas.microsoft.com/office/powerpoint/2010/main" val="2397533074"/>
       </p:ext>
     </p:extLst>
   </p:cSld>
@@ -1326,8 +1326,8 @@
         </p:nvSpPr>
         <p:spPr>
           <a:xfrm>
-            <a:off x="1133714" y="219075"/>
-            <a:ext cx="14196060" cy="795338"/>
+            <a:off x="1385650" y="219075"/>
+            <a:ext cx="17350740" cy="795338"/>
           </a:xfrm>
         </p:spPr>
         <p:txBody>
@@ -1354,8 +1354,8 @@
         </p:nvSpPr>
         <p:spPr>
           <a:xfrm>
-            <a:off x="1133715" y="1008698"/>
-            <a:ext cx="6963012" cy="494347"/>
+            <a:off x="1385651" y="1008698"/>
+            <a:ext cx="8510349" cy="494347"/>
           </a:xfrm>
         </p:spPr>
         <p:txBody>
@@ -1419,8 +1419,8 @@
         </p:nvSpPr>
         <p:spPr>
           <a:xfrm>
-            <a:off x="1133715" y="1503045"/>
-            <a:ext cx="6963012" cy="2210753"/>
+            <a:off x="1385651" y="1503045"/>
+            <a:ext cx="8510349" cy="2210753"/>
           </a:xfrm>
         </p:spPr>
         <p:txBody>
@@ -1476,8 +1476,8 @@
         </p:nvSpPr>
         <p:spPr>
           <a:xfrm>
-            <a:off x="8332470" y="1008698"/>
-            <a:ext cx="6997304" cy="494347"/>
+            <a:off x="10184130" y="1008698"/>
+            <a:ext cx="8552260" cy="494347"/>
           </a:xfrm>
         </p:spPr>
         <p:txBody>
@@ -1541,8 +1541,8 @@
         </p:nvSpPr>
         <p:spPr>
           <a:xfrm>
-            <a:off x="8332470" y="1503045"/>
-            <a:ext cx="6997304" cy="2210753"/>
+            <a:off x="10184130" y="1503045"/>
+            <a:ext cx="8552260" cy="2210753"/>
           </a:xfrm>
         </p:spPr>
         <p:txBody>
@@ -1654,7 +1654,7 @@
     </p:spTree>
     <p:extLst>
       <p:ext uri="{BB962C8B-B14F-4D97-AF65-F5344CB8AC3E}">
-        <p14:creationId xmlns:p14="http://schemas.microsoft.com/office/powerpoint/2010/main" val="4183820994"/>
+        <p14:creationId xmlns:p14="http://schemas.microsoft.com/office/powerpoint/2010/main" val="3882619945"/>
       </p:ext>
     </p:extLst>
   </p:cSld>
@@ -1772,7 +1772,7 @@
     </p:spTree>
     <p:extLst>
       <p:ext uri="{BB962C8B-B14F-4D97-AF65-F5344CB8AC3E}">
-        <p14:creationId xmlns:p14="http://schemas.microsoft.com/office/powerpoint/2010/main" val="2404889437"/>
+        <p14:creationId xmlns:p14="http://schemas.microsoft.com/office/powerpoint/2010/main" val="1628362244"/>
       </p:ext>
     </p:extLst>
   </p:cSld>
@@ -1867,7 +1867,7 @@
     </p:spTree>
     <p:extLst>
       <p:ext uri="{BB962C8B-B14F-4D97-AF65-F5344CB8AC3E}">
-        <p14:creationId xmlns:p14="http://schemas.microsoft.com/office/powerpoint/2010/main" val="954719711"/>
+        <p14:creationId xmlns:p14="http://schemas.microsoft.com/office/powerpoint/2010/main" val="492177113"/>
       </p:ext>
     </p:extLst>
   </p:cSld>
@@ -1906,8 +1906,8 @@
         </p:nvSpPr>
         <p:spPr>
           <a:xfrm>
-            <a:off x="1133714" y="274320"/>
-            <a:ext cx="5308520" cy="960120"/>
+            <a:off x="1385651" y="274320"/>
+            <a:ext cx="6488191" cy="960120"/>
           </a:xfrm>
         </p:spPr>
         <p:txBody>
@@ -1938,8 +1938,8 @@
         </p:nvSpPr>
         <p:spPr>
           <a:xfrm>
-            <a:off x="6997304" y="592455"/>
-            <a:ext cx="8332470" cy="2924175"/>
+            <a:off x="8552260" y="592455"/>
+            <a:ext cx="10184130" cy="2924175"/>
           </a:xfrm>
         </p:spPr>
         <p:txBody>
@@ -2023,8 +2023,8 @@
         </p:nvSpPr>
         <p:spPr>
           <a:xfrm>
-            <a:off x="1133714" y="1234440"/>
-            <a:ext cx="5308520" cy="2286953"/>
+            <a:off x="1385651" y="1234440"/>
+            <a:ext cx="6488191" cy="2286953"/>
           </a:xfrm>
         </p:spPr>
         <p:txBody>
@@ -2144,7 +2144,7 @@
     </p:spTree>
     <p:extLst>
       <p:ext uri="{BB962C8B-B14F-4D97-AF65-F5344CB8AC3E}">
-        <p14:creationId xmlns:p14="http://schemas.microsoft.com/office/powerpoint/2010/main" val="2795653300"/>
+        <p14:creationId xmlns:p14="http://schemas.microsoft.com/office/powerpoint/2010/main" val="1180592097"/>
       </p:ext>
     </p:extLst>
   </p:cSld>
@@ -2183,8 +2183,8 @@
         </p:nvSpPr>
         <p:spPr>
           <a:xfrm>
-            <a:off x="1133714" y="274320"/>
-            <a:ext cx="5308520" cy="960120"/>
+            <a:off x="1385651" y="274320"/>
+            <a:ext cx="6488191" cy="960120"/>
           </a:xfrm>
         </p:spPr>
         <p:txBody>
@@ -2215,8 +2215,8 @@
         </p:nvSpPr>
         <p:spPr>
           <a:xfrm>
-            <a:off x="6997304" y="592455"/>
-            <a:ext cx="8332470" cy="2924175"/>
+            <a:off x="8552260" y="592455"/>
+            <a:ext cx="10184130" cy="2924175"/>
           </a:xfrm>
         </p:spPr>
         <p:txBody>
@@ -2280,8 +2280,8 @@
         </p:nvSpPr>
         <p:spPr>
           <a:xfrm>
-            <a:off x="1133714" y="1234440"/>
-            <a:ext cx="5308520" cy="2286953"/>
+            <a:off x="1385651" y="1234440"/>
+            <a:ext cx="6488191" cy="2286953"/>
           </a:xfrm>
         </p:spPr>
         <p:txBody>
@@ -2401,7 +2401,7 @@
     </p:spTree>
     <p:extLst>
       <p:ext uri="{BB962C8B-B14F-4D97-AF65-F5344CB8AC3E}">
-        <p14:creationId xmlns:p14="http://schemas.microsoft.com/office/powerpoint/2010/main" val="2137225164"/>
+        <p14:creationId xmlns:p14="http://schemas.microsoft.com/office/powerpoint/2010/main" val="3367805484"/>
       </p:ext>
     </p:extLst>
   </p:cSld>
@@ -2445,8 +2445,8 @@
         </p:nvSpPr>
         <p:spPr>
           <a:xfrm>
-            <a:off x="1131570" y="219075"/>
-            <a:ext cx="14196060" cy="795338"/>
+            <a:off x="1383030" y="219075"/>
+            <a:ext cx="17350740" cy="795338"/>
           </a:xfrm>
           <a:prstGeom prst="rect">
             <a:avLst/>
@@ -2478,8 +2478,8 @@
         </p:nvSpPr>
         <p:spPr>
           <a:xfrm>
-            <a:off x="1131570" y="1095375"/>
-            <a:ext cx="14196060" cy="2610803"/>
+            <a:off x="1383030" y="1095375"/>
+            <a:ext cx="17350740" cy="2610803"/>
           </a:xfrm>
           <a:prstGeom prst="rect">
             <a:avLst/>
@@ -2540,8 +2540,8 @@
         </p:nvSpPr>
         <p:spPr>
           <a:xfrm>
-            <a:off x="1131570" y="3813810"/>
-            <a:ext cx="3703320" cy="219075"/>
+            <a:off x="1383030" y="3813810"/>
+            <a:ext cx="4526280" cy="219075"/>
           </a:xfrm>
           <a:prstGeom prst="rect">
             <a:avLst/>
@@ -2581,8 +2581,8 @@
         </p:nvSpPr>
         <p:spPr>
           <a:xfrm>
-            <a:off x="5452110" y="3813810"/>
-            <a:ext cx="5554980" cy="219075"/>
+            <a:off x="6663690" y="3813810"/>
+            <a:ext cx="6789420" cy="219075"/>
           </a:xfrm>
           <a:prstGeom prst="rect">
             <a:avLst/>
@@ -2618,8 +2618,8 @@
         </p:nvSpPr>
         <p:spPr>
           <a:xfrm>
-            <a:off x="11624310" y="3813810"/>
-            <a:ext cx="3703320" cy="219075"/>
+            <a:off x="14207490" y="3813810"/>
+            <a:ext cx="4526280" cy="219075"/>
           </a:xfrm>
           <a:prstGeom prst="rect">
             <a:avLst/>
@@ -2650,23 +2650,23 @@
     </p:spTree>
     <p:extLst>
       <p:ext uri="{BB962C8B-B14F-4D97-AF65-F5344CB8AC3E}">
-        <p14:creationId xmlns:p14="http://schemas.microsoft.com/office/powerpoint/2010/main" val="2414031849"/>
+        <p14:creationId xmlns:p14="http://schemas.microsoft.com/office/powerpoint/2010/main" val="840098314"/>
       </p:ext>
     </p:extLst>
   </p:cSld>
   <p:clrMap bg1="lt1" tx1="dk1" bg2="lt2" tx2="dk2" accent1="accent1" accent2="accent2" accent3="accent3" accent4="accent4" accent5="accent5" accent6="accent6" hlink="hlink" folHlink="folHlink"/>
   <p:sldLayoutIdLst>
-    <p:sldLayoutId id="2147483685" r:id="rId1"/>
-    <p:sldLayoutId id="2147483686" r:id="rId2"/>
-    <p:sldLayoutId id="2147483687" r:id="rId3"/>
-    <p:sldLayoutId id="2147483688" r:id="rId4"/>
-    <p:sldLayoutId id="2147483689" r:id="rId5"/>
-    <p:sldLayoutId id="2147483690" r:id="rId6"/>
-    <p:sldLayoutId id="2147483691" r:id="rId7"/>
-    <p:sldLayoutId id="2147483692" r:id="rId8"/>
-    <p:sldLayoutId id="2147483693" r:id="rId9"/>
-    <p:sldLayoutId id="2147483694" r:id="rId10"/>
-    <p:sldLayoutId id="2147483695" r:id="rId11"/>
+    <p:sldLayoutId id="2147483697" r:id="rId1"/>
+    <p:sldLayoutId id="2147483698" r:id="rId2"/>
+    <p:sldLayoutId id="2147483699" r:id="rId3"/>
+    <p:sldLayoutId id="2147483700" r:id="rId4"/>
+    <p:sldLayoutId id="2147483701" r:id="rId5"/>
+    <p:sldLayoutId id="2147483702" r:id="rId6"/>
+    <p:sldLayoutId id="2147483703" r:id="rId7"/>
+    <p:sldLayoutId id="2147483704" r:id="rId8"/>
+    <p:sldLayoutId id="2147483705" r:id="rId9"/>
+    <p:sldLayoutId id="2147483706" r:id="rId10"/>
+    <p:sldLayoutId id="2147483707" r:id="rId11"/>
   </p:sldLayoutIdLst>
   <p:txStyles>
     <p:titleStyle>
@@ -2982,8 +2982,8 @@
         </p:nvSpPr>
         <p:spPr>
           <a:xfrm>
-            <a:off x="443888" y="1279417"/>
-            <a:ext cx="2975656" cy="1000898"/>
+            <a:off x="261008" y="1314019"/>
+            <a:ext cx="3308026" cy="1000898"/>
           </a:xfrm>
           <a:prstGeom prst="roundRect">
             <a:avLst/>
@@ -3009,7 +3009,7 @@
           <a:p>
             <a:pPr algn="ctr"/>
             <a:r>
-              <a:rPr lang="en-US" sz="3240" dirty="0"/>
+              <a:rPr lang="en-US" sz="3600" dirty="0"/>
               <a:t>[1,2,3] ++ [4,5]</a:t>
             </a:r>
           </a:p>
@@ -3029,7 +3029,7 @@
         </p:nvSpPr>
         <p:spPr>
           <a:xfrm>
-            <a:off x="3813768" y="49389"/>
+            <a:off x="5301602" y="97561"/>
             <a:ext cx="3181396" cy="1000898"/>
           </a:xfrm>
           <a:prstGeom prst="roundRect">
@@ -3056,7 +3056,7 @@
           <a:p>
             <a:pPr algn="ctr"/>
             <a:r>
-              <a:rPr lang="en-US" sz="3240" dirty="0"/>
+              <a:rPr lang="en-US" sz="3600" dirty="0"/>
               <a:t>1 : ⊥</a:t>
             </a:r>
           </a:p>
@@ -3076,8 +3076,8 @@
         </p:nvSpPr>
         <p:spPr>
           <a:xfrm>
-            <a:off x="3813768" y="2370797"/>
-            <a:ext cx="3181396" cy="1000898"/>
+            <a:off x="5248344" y="2370797"/>
+            <a:ext cx="3575620" cy="1000898"/>
           </a:xfrm>
           <a:prstGeom prst="roundRect">
             <a:avLst/>
@@ -3103,7 +3103,7 @@
           <a:p>
             <a:pPr algn="ctr"/>
             <a:r>
-              <a:rPr lang="en-US" sz="3240" dirty="0"/>
+              <a:rPr lang="en-US" sz="3600" dirty="0"/>
               <a:t>1 : ([2,3]++[4,5])</a:t>
             </a:r>
           </a:p>
@@ -3123,8 +3123,8 @@
         </p:nvSpPr>
         <p:spPr>
           <a:xfrm>
-            <a:off x="7971077" y="32113"/>
-            <a:ext cx="3571591" cy="1000898"/>
+            <a:off x="10058396" y="32113"/>
+            <a:ext cx="3926317" cy="1000898"/>
           </a:xfrm>
           <a:prstGeom prst="roundRect">
             <a:avLst/>
@@ -3150,7 +3150,7 @@
           <a:p>
             <a:pPr algn="ctr"/>
             <a:r>
-              <a:rPr lang="en-US" sz="3240" dirty="0"/>
+              <a:rPr lang="en-US" sz="3600" dirty="0"/>
               <a:t>1 : 2 : ⊥</a:t>
             </a:r>
           </a:p>
@@ -3170,8 +3170,8 @@
         </p:nvSpPr>
         <p:spPr>
           <a:xfrm>
-            <a:off x="7861646" y="2370797"/>
-            <a:ext cx="3571592" cy="1000898"/>
+            <a:off x="10058400" y="2370797"/>
+            <a:ext cx="3926317" cy="1000898"/>
           </a:xfrm>
           <a:prstGeom prst="roundRect">
             <a:avLst/>
@@ -3197,7 +3197,7 @@
           <a:p>
             <a:pPr algn="ctr"/>
             <a:r>
-              <a:rPr lang="en-US" sz="3240" dirty="0"/>
+              <a:rPr lang="en-US" sz="3600" dirty="0"/>
               <a:t>1 : 2 : ([3] ++ [4,5])</a:t>
             </a:r>
           </a:p>
@@ -3217,8 +3217,8 @@
         </p:nvSpPr>
         <p:spPr>
           <a:xfrm>
-            <a:off x="12224595" y="3960"/>
-            <a:ext cx="3926316" cy="1000898"/>
+            <a:off x="15219153" y="56693"/>
+            <a:ext cx="4454997" cy="1000898"/>
           </a:xfrm>
           <a:prstGeom prst="roundRect">
             <a:avLst/>
@@ -3244,7 +3244,7 @@
           <a:p>
             <a:pPr algn="ctr"/>
             <a:r>
-              <a:rPr lang="en-US" sz="3240" dirty="0"/>
+              <a:rPr lang="en-US" sz="3600" dirty="0"/>
               <a:t>1 : 2 : 3 : ⊥</a:t>
             </a:r>
           </a:p>
@@ -3264,8 +3264,8 @@
         </p:nvSpPr>
         <p:spPr>
           <a:xfrm>
-            <a:off x="12224598" y="2370797"/>
-            <a:ext cx="3926317" cy="1000898"/>
+            <a:off x="15219153" y="2369234"/>
+            <a:ext cx="4454997" cy="1000898"/>
           </a:xfrm>
           <a:prstGeom prst="roundRect">
             <a:avLst/>
@@ -3291,7 +3291,7 @@
           <a:p>
             <a:pPr algn="ctr"/>
             <a:r>
-              <a:rPr lang="en-US" sz="3240" dirty="0"/>
+              <a:rPr lang="en-US" sz="3600" dirty="0"/>
               <a:t>1 : 2 : 3 : ([] ++ [4,5])</a:t>
             </a:r>
           </a:p>
@@ -3307,6 +3307,7 @@
             </a:extLst>
           </p:cNvPr>
           <p:cNvCxnSpPr>
+            <a:cxnSpLocks/>
             <a:stCxn id="4" idx="3"/>
             <a:endCxn id="7" idx="1"/>
           </p:cNvCxnSpPr>
@@ -3314,8 +3315,8 @@
         </p:nvCxnSpPr>
         <p:spPr>
           <a:xfrm flipV="1">
-            <a:off x="3419543" y="549841"/>
-            <a:ext cx="394226" cy="1230027"/>
+            <a:off x="3569034" y="598010"/>
+            <a:ext cx="1732568" cy="1216458"/>
           </a:xfrm>
           <a:prstGeom prst="straightConnector1">
             <a:avLst/>
@@ -3363,8 +3364,8 @@
         </p:nvCxnSpPr>
         <p:spPr>
           <a:xfrm>
-            <a:off x="3419543" y="1779866"/>
-            <a:ext cx="394226" cy="1091380"/>
+            <a:off x="3569034" y="1814468"/>
+            <a:ext cx="1679310" cy="1056778"/>
           </a:xfrm>
           <a:prstGeom prst="straightConnector1">
             <a:avLst/>
@@ -3412,8 +3413,8 @@
         </p:nvCxnSpPr>
         <p:spPr>
           <a:xfrm>
-            <a:off x="6995163" y="2871246"/>
-            <a:ext cx="866486" cy="0"/>
+            <a:off x="8823964" y="2871246"/>
+            <a:ext cx="1234436" cy="0"/>
           </a:xfrm>
           <a:prstGeom prst="straightConnector1">
             <a:avLst/>
@@ -3454,14 +3455,15 @@
           </p:cNvPr>
           <p:cNvCxnSpPr>
             <a:cxnSpLocks/>
+            <a:stCxn id="8" idx="3"/>
             <a:endCxn id="9" idx="1"/>
           </p:cNvCxnSpPr>
           <p:nvPr/>
         </p:nvCxnSpPr>
         <p:spPr>
           <a:xfrm flipV="1">
-            <a:off x="6995161" y="532563"/>
-            <a:ext cx="975914" cy="2272152"/>
+            <a:off x="8823964" y="532562"/>
+            <a:ext cx="1234432" cy="2338684"/>
           </a:xfrm>
           <a:prstGeom prst="straightConnector1">
             <a:avLst/>
@@ -3508,9 +3510,9 @@
           <p:nvPr/>
         </p:nvCxnSpPr>
         <p:spPr>
-          <a:xfrm>
-            <a:off x="11433241" y="2871246"/>
-            <a:ext cx="791357" cy="0"/>
+          <a:xfrm flipV="1">
+            <a:off x="13984717" y="2869683"/>
+            <a:ext cx="1234436" cy="1563"/>
           </a:xfrm>
           <a:prstGeom prst="straightConnector1">
             <a:avLst/>
@@ -3558,8 +3560,8 @@
         </p:nvCxnSpPr>
         <p:spPr>
           <a:xfrm flipV="1">
-            <a:off x="11433241" y="504409"/>
-            <a:ext cx="791357" cy="2366836"/>
+            <a:off x="13984717" y="557142"/>
+            <a:ext cx="1234436" cy="2314104"/>
           </a:xfrm>
           <a:prstGeom prst="straightConnector1">
             <a:avLst/>
@@ -3603,8 +3605,8 @@
         </p:nvSpPr>
         <p:spPr>
           <a:xfrm>
-            <a:off x="2144548" y="459359"/>
-            <a:ext cx="1274996" cy="590931"/>
+            <a:off x="3856125" y="430938"/>
+            <a:ext cx="1274996" cy="646331"/>
           </a:xfrm>
           <a:prstGeom prst="rect">
             <a:avLst/>
@@ -3618,7 +3620,7 @@
           <a:lstStyle/>
           <a:p>
             <a:r>
-              <a:rPr lang="en-US" sz="3240" dirty="0"/>
+              <a:rPr lang="en-US" sz="3600" dirty="0"/>
               <a:t>Skip</a:t>
             </a:r>
           </a:p>
@@ -3638,8 +3640,8 @@
         </p:nvSpPr>
         <p:spPr>
           <a:xfrm>
-            <a:off x="1740234" y="2575781"/>
-            <a:ext cx="1801998" cy="590931"/>
+            <a:off x="3048000" y="2575779"/>
+            <a:ext cx="2029863" cy="646331"/>
           </a:xfrm>
           <a:prstGeom prst="rect">
             <a:avLst/>
@@ -3653,7 +3655,7 @@
           <a:lstStyle/>
           <a:p>
             <a:r>
-              <a:rPr lang="en-US" sz="3240" dirty="0"/>
+              <a:rPr lang="en-US" sz="3600" dirty="0"/>
               <a:t>Evaluate</a:t>
             </a:r>
           </a:p>
@@ -3673,8 +3675,8 @@
         </p:nvSpPr>
         <p:spPr>
           <a:xfrm>
-            <a:off x="6238591" y="1188937"/>
-            <a:ext cx="1274996" cy="590931"/>
+            <a:off x="8239721" y="1206239"/>
+            <a:ext cx="1274996" cy="646331"/>
           </a:xfrm>
           <a:prstGeom prst="rect">
             <a:avLst/>
@@ -3688,7 +3690,7 @@
           <a:lstStyle/>
           <a:p>
             <a:r>
-              <a:rPr lang="en-US" sz="3240" dirty="0"/>
+              <a:rPr lang="en-US" sz="3600" dirty="0"/>
               <a:t>Skip</a:t>
             </a:r>
           </a:p>
@@ -3708,8 +3710,8 @@
         </p:nvSpPr>
         <p:spPr>
           <a:xfrm>
-            <a:off x="6612587" y="3371697"/>
-            <a:ext cx="1801998" cy="590931"/>
+            <a:off x="8239721" y="3371698"/>
+            <a:ext cx="2003664" cy="646331"/>
           </a:xfrm>
           <a:prstGeom prst="rect">
             <a:avLst/>
@@ -3723,7 +3725,7 @@
           <a:lstStyle/>
           <a:p>
             <a:r>
-              <a:rPr lang="en-US" sz="3240" dirty="0"/>
+              <a:rPr lang="en-US" sz="3600" dirty="0"/>
               <a:t>Evaluate</a:t>
             </a:r>
           </a:p>
@@ -3743,8 +3745,8 @@
         </p:nvSpPr>
         <p:spPr>
           <a:xfrm>
-            <a:off x="10689323" y="1262398"/>
-            <a:ext cx="1274996" cy="590931"/>
+            <a:off x="12979259" y="1210273"/>
+            <a:ext cx="1274996" cy="646331"/>
           </a:xfrm>
           <a:prstGeom prst="rect">
             <a:avLst/>
@@ -3758,7 +3760,7 @@
           <a:lstStyle/>
           <a:p>
             <a:r>
-              <a:rPr lang="en-US" sz="3240" dirty="0"/>
+              <a:rPr lang="en-US" sz="3600" dirty="0"/>
               <a:t>Skip</a:t>
             </a:r>
           </a:p>
@@ -3778,8 +3780,8 @@
         </p:nvSpPr>
         <p:spPr>
           <a:xfrm>
-            <a:off x="11063318" y="3326456"/>
-            <a:ext cx="1801998" cy="590931"/>
+            <a:off x="13260073" y="3326457"/>
+            <a:ext cx="2003664" cy="646331"/>
           </a:xfrm>
           <a:prstGeom prst="rect">
             <a:avLst/>
@@ -3793,7 +3795,7 @@
           <a:lstStyle/>
           <a:p>
             <a:r>
-              <a:rPr lang="en-US" sz="3240" dirty="0"/>
+              <a:rPr lang="en-US" sz="3600" dirty="0"/>
               <a:t>Evaluate</a:t>
             </a:r>
           </a:p>
